--- a/presentations/PR_L12_ValidationAndAuthentication_Lesson.pptx
+++ b/presentations/PR_L12_ValidationAndAuthentication_Lesson.pptx
@@ -2167,7 +2167,7 @@
                 <a:ea typeface="IBM Plex Sans" pitchFamily="34" charset="-122"/>
                 <a:cs typeface="IBM Plex Sans" pitchFamily="34" charset="-120"/>
               </a:rPr>
-              <a:t>Users mistype, and some of them try it on. At the gatehouse you will write the checks that keep bad data out and the loops that keep asking until the data is right.</a:t>
+              <a:t>Users mistype, and some of them try it on. Work through the six stations and you will write the checks that keep bad data out, the loops that keep asking until it is right, and the authentication that decides who gets in.</a:t>
             </a:r>
             <a:endParaRPr lang="en-US" sz="1800" dirty="0"/>
           </a:p>
@@ -2725,7 +2725,7 @@
                 <a:ea typeface="IBM Plex Sans" pitchFamily="34" charset="-122"/>
                 <a:cs typeface="IBM Plex Sans" pitchFamily="34" charset="-120"/>
               </a:rPr>
-              <a:t>Plan the checks a club sign-up needs for a username and an age.</a:t>
+              <a:t>Which checks does a username need, and in which order should they run?</a:t>
             </a:r>
             <a:endParaRPr lang="en-US" sz="1600" dirty="0"/>
           </a:p>
@@ -2805,7 +2805,7 @@
                 <a:ea typeface="IBM Plex Sans" pitchFamily="34" charset="-122"/>
                 <a:cs typeface="IBM Plex Sans" pitchFamily="34" charset="-120"/>
               </a:rPr>
-              <a:t>Skipping a bad line and counting it is often better than stopping: the report still comes out.</a:t>
+              <a:t>Naming a bad line and carrying on is usually better than stopping, because the run still...</a:t>
             </a:r>
             <a:endParaRPr lang="en-US" sz="1600" dirty="0"/>
           </a:p>
@@ -3104,7 +3104,7 @@
                 <a:ea typeface="IBM Plex Sans" pitchFamily="34" charset="-122"/>
                 <a:cs typeface="IBM Plex Sans" pitchFamily="34" charset="-120"/>
               </a:rPr>
-              <a:t>Eight rules are pinned up in the gatehouse. Tap the star and sort each one into the kind of check it is.</a:t>
+              <a:t>Eight rules are listed on the floor below you. Tap the star and sort each one into the kind of check it is.</a:t>
             </a:r>
             <a:endParaRPr lang="en-US" sz="2200" dirty="0"/>
           </a:p>
@@ -3417,7 +3417,7 @@
                 <a:ea typeface="IBM Plex Sans" pitchFamily="34" charset="-122"/>
                 <a:cs typeface="IBM Plex Sans" pitchFamily="34" charset="-120"/>
               </a:rPr>
-              <a:t>Strip it first</a:t>
+              <a:t>A list of allowed values</a:t>
             </a:r>
             <a:endParaRPr lang="en-US" sz="1600" dirty="0"/>
           </a:p>
@@ -3459,7 +3459,7 @@
                 <a:ea typeface="IBM Plex Sans" pitchFamily="34" charset="-122"/>
                 <a:cs typeface="IBM Plex Sans" pitchFamily="34" charset="-120"/>
               </a:rPr>
-              <a:t>A stray space is still a character, so a presence check should strip the input before testing it for empty.</a:t>
+              <a:t>Some values are only valid if they appear on a list the program already holds, which is a lookup check. Comparing exactly means one capital letter makes a value unknown, so decide whether to lower() both sides first.</a:t>
             </a:r>
             <a:endParaRPr lang="en-US" sz="1300" dirty="0"/>
           </a:p>
@@ -3567,7 +3567,7 @@
                 <a:ea typeface="IBM Plex Sans" pitchFamily="34" charset="-122"/>
                 <a:cs typeface="IBM Plex Sans" pitchFamily="34" charset="-120"/>
               </a:rPr>
-              <a:t>'From 1 to 10 inclusive' means 1 and 10 both pass. Test them: that is exactly what boundary data is for.</a:t>
+              <a:t>'From 1 to 10 inclusive' means 1 and 10 both pass. Test them: that is exactly what boundary data is for. Watch out that isdigit() calls a minus sign a non-digit, so a range allowing negatives needs that sign checked on its own.</a:t>
             </a:r>
             <a:endParaRPr lang="en-US" sz="1300" dirty="0"/>
           </a:p>
@@ -3741,7 +3741,7 @@
                 <a:ea typeface="IBM Plex Sans" pitchFamily="34" charset="-122"/>
                 <a:cs typeface="IBM Plex Sans" pitchFamily="34" charset="-120"/>
               </a:rPr>
-              <a:t>Three tries</a:t>
+              <a:t>Say what was wrong</a:t>
             </a:r>
             <a:endParaRPr lang="en-US" sz="1600" dirty="0"/>
           </a:p>
@@ -3783,7 +3783,7 @@
                 <a:ea typeface="IBM Plex Sans" pitchFamily="34" charset="-122"/>
                 <a:cs typeface="IBM Plex Sans" pitchFamily="34" charset="-120"/>
               </a:rPr>
-              <a:t>Locking an account after three wrong passwords stops a program being guessed at one attempt at a time.</a:t>
+              <a:t>A loop that only answers 'invalid' leaves the user guessing. Testing the rules one at a time lets the program name the rule that was broken, which is why these checks are usually written as if ... elif ...</a:t>
             </a:r>
             <a:endParaRPr lang="en-US" sz="1300" dirty="0"/>
           </a:p>
@@ -4060,7 +4060,7 @@
                 <a:ea typeface="IBM Plex Sans" pitchFamily="34" charset="-122"/>
                 <a:cs typeface="IBM Plex Sans" pitchFamily="34" charset="-120"/>
               </a:rPr>
-              <a:t>A range check for a satisfaction score that must be from 1 to 10 inclusive is written if score &gt; 1 and score &lt; 10. State the two scores this wrongly refuses, and write the condition corrected.</a:t>
+              <a:t>A range check for a score that must be from 1 to 10 inclusive is written if score &gt; 1 and score &lt; 10. State the two scores this wrongly refuses, and write the condition corrected.</a:t>
             </a:r>
             <a:endParaRPr lang="en-US" sz="1700" dirty="0"/>
           </a:p>
@@ -4190,7 +4190,7 @@
                 <a:ea typeface="IBM Plex Sans" pitchFamily="34" charset="-122"/>
                 <a:cs typeface="IBM Plex Sans" pitchFamily="34" charset="-120"/>
               </a:rPr>
-              <a:t>Write a program that keeps asking for a tutor group code of exactly one letter followed by two digits until a valid one is typed.</a:t>
+              <a:t>Write a program that keeps asking for a code of exactly one letter followed by two digits, saying what is wrong each time, until a valid code is typed.</a:t>
             </a:r>
             <a:endParaRPr lang="en-US" sz="1700" dirty="0"/>
           </a:p>
@@ -4320,7 +4320,7 @@
                 <a:ea typeface="IBM Plex Sans" pitchFamily="34" charset="-122"/>
                 <a:cs typeface="IBM Plex Sans" pitchFamily="34" charset="-120"/>
               </a:rPr>
-              <a:t>Write a program that allows three attempts at the four-digit passcode 2471, and prints Locked if all three attempts are wrong.</a:t>
+              <a:t>Write a program that allows three attempts at a four-digit passcode already held in the program, and prints Locked when all three attempts are wrong.</a:t>
             </a:r>
             <a:endParaRPr lang="en-US" sz="1700" dirty="0"/>
           </a:p>
@@ -5726,7 +5726,7 @@
                 <a:ea typeface="IBM Plex Sans" pitchFamily="34" charset="-122"/>
                 <a:cs typeface="IBM Plex Sans" pitchFamily="34" charset="-120"/>
               </a:rPr>
-              <a:t>Know how to code a presence, type, range, length and format check</a:t>
+              <a:t>Know how to code a presence check, a type check and a range check</a:t>
             </a:r>
             <a:endParaRPr lang="en-US" sz="1900" dirty="0"/>
           </a:p>
@@ -5824,7 +5824,7 @@
                 <a:ea typeface="IBM Plex Sans" pitchFamily="34" charset="-122"/>
                 <a:cs typeface="IBM Plex Sans" pitchFamily="34" charset="-120"/>
               </a:rPr>
-              <a:t>Understand how a validation loop keeps asking until the value typed in passes every check</a:t>
+              <a:t>Understand how a length check and a format check differ, and why the length is tested first</a:t>
             </a:r>
             <a:endParaRPr lang="en-US" sz="1900" dirty="0"/>
           </a:p>
@@ -5922,7 +5922,7 @@
                 <a:ea typeface="IBM Plex Sans" pitchFamily="34" charset="-122"/>
                 <a:cs typeface="IBM Plex Sans" pitchFamily="34" charset="-120"/>
               </a:rPr>
-              <a:t>Know how to code an authentication check that allows only a set number of attempts</a:t>
+              <a:t>Know how to write a validation loop, and an authentication check that allows a set number of attempts</a:t>
             </a:r>
             <a:endParaRPr lang="en-US" sz="1900" dirty="0"/>
           </a:p>
@@ -7895,7 +7895,7 @@
                 <a:ea typeface="IBM Plex Sans" pitchFamily="34" charset="-122"/>
                 <a:cs typeface="IBM Plex Sans" pitchFamily="34" charset="-120"/>
               </a:rPr>
-              <a:t>Validation checks data is sensible, not that it is true: a wrong but sensible date passes every check.</a:t>
+              <a:t>Validation can only check that data is sensible, never that it is...</a:t>
             </a:r>
             <a:endParaRPr lang="en-US" sz="1600" dirty="0"/>
           </a:p>
@@ -8471,7 +8471,7 @@
                 <a:ea typeface="IBM Plex Sans" pitchFamily="34" charset="-122"/>
                 <a:cs typeface="IBM Plex Sans" pitchFamily="34" charset="-120"/>
               </a:rPr>
-              <a:t>Negative values are fine for a temperature but never for an age, so a range check must suit its data.</a:t>
+              <a:t>A negative value is sensible for a temperature but never for an age, so the limits of a range check come from...</a:t>
             </a:r>
             <a:endParaRPr lang="en-US" sz="1600" dirty="0"/>
           </a:p>
@@ -8967,7 +8967,7 @@
                 <a:ea typeface="IBM Plex Sans" pitchFamily="34" charset="-122"/>
                 <a:cs typeface="IBM Plex Sans" pitchFamily="34" charset="-120"/>
               </a:rPr>
-              <a:t>Describe the checks a reference of two letters then four digits needs.</a:t>
+              <a:t>Describe the checks a code of two letters then four digits needs.</a:t>
             </a:r>
             <a:endParaRPr lang="en-US" sz="1600" dirty="0"/>
           </a:p>
@@ -9047,7 +9047,7 @@
                 <a:ea typeface="IBM Plex Sans" pitchFamily="34" charset="-122"/>
                 <a:cs typeface="IBM Plex Sans" pitchFamily="34" charset="-120"/>
               </a:rPr>
-              <a:t>isalpha(), isdigit() and isnumeric() each answer one format question about a whole string at once.</a:t>
+              <a:t>isalpha() and isdigit() ask their question of every character at once, so either one is False as soon as one character...</a:t>
             </a:r>
             <a:endParaRPr lang="en-US" sz="1600" dirty="0"/>
           </a:p>
@@ -9623,7 +9623,7 @@
                 <a:ea typeface="IBM Plex Sans" pitchFamily="34" charset="-122"/>
                 <a:cs typeface="IBM Plex Sans" pitchFamily="34" charset="-120"/>
               </a:rPr>
-              <a:t>A loop that keeps asking until the data is right is the simplest defensive design there is.</a:t>
+              <a:t>A loop that reads, checks and asks again until the value passes is the simplest defensive design there is, and it is called a...</a:t>
             </a:r>
             <a:endParaRPr lang="en-US" sz="1600" dirty="0"/>
           </a:p>
@@ -10199,7 +10199,7 @@
                 <a:ea typeface="IBM Plex Sans" pitchFamily="34" charset="-122"/>
                 <a:cs typeface="IBM Plex Sans" pitchFamily="34" charset="-120"/>
               </a:rPr>
-              <a:t>Validation checks data and authentication checks people, and the exam asks for that difference often.</a:t>
+              <a:t>Validation checks the data that was typed, while authentication checks the...</a:t>
             </a:r>
             <a:endParaRPr lang="en-US" sz="1600" dirty="0"/>
           </a:p>

--- a/presentations/PR_L12_ValidationAndAuthentication_Lesson.pptx
+++ b/presentations/PR_L12_ValidationAndAuthentication_Lesson.pptx
@@ -4060,7 +4060,279 @@
                 <a:ea typeface="IBM Plex Sans" pitchFamily="34" charset="-122"/>
                 <a:cs typeface="IBM Plex Sans" pitchFamily="34" charset="-120"/>
               </a:rPr>
-              <a:t>A range check for a score that must be from 1 to 10 inclusive is written if score &gt; 1 and score &lt; 10. State the two scores this wrongly refuses, and write the condition corrected.</a:t>
+              <a:t>A range check for a score that must be from 1 to 10 inclusive is written </a:t>
+            </a:r>
+            <a:pPr indent="0" marL="0">
+              <a:lnSpc>
+                <a:spcPct val="118000"/>
+              </a:lnSpc>
+              <a:buNone/>
+            </a:pPr>
+            <a:r>
+              <a:rPr lang="en-US" sz="1700" dirty="0">
+                <a:solidFill>
+                  <a:srgbClr val="6B21A8"/>
+                </a:solidFill>
+                <a:latin typeface="IBM Plex Mono" pitchFamily="34" charset="0"/>
+                <a:ea typeface="IBM Plex Mono" pitchFamily="34" charset="-122"/>
+                <a:cs typeface="IBM Plex Mono" pitchFamily="34" charset="-120"/>
+              </a:rPr>
+              <a:t>if</a:t>
+            </a:r>
+            <a:pPr indent="0" marL="0">
+              <a:lnSpc>
+                <a:spcPct val="118000"/>
+              </a:lnSpc>
+              <a:buNone/>
+            </a:pPr>
+            <a:r>
+              <a:rPr lang="en-US" sz="1700" dirty="0">
+                <a:solidFill>
+                  <a:srgbClr val="18181B"/>
+                </a:solidFill>
+                <a:latin typeface="IBM Plex Mono" pitchFamily="34" charset="0"/>
+                <a:ea typeface="IBM Plex Mono" pitchFamily="34" charset="-122"/>
+                <a:cs typeface="IBM Plex Mono" pitchFamily="34" charset="-120"/>
+              </a:rPr>
+              <a:t> </a:t>
+            </a:r>
+            <a:pPr indent="0" marL="0">
+              <a:lnSpc>
+                <a:spcPct val="118000"/>
+              </a:lnSpc>
+              <a:buNone/>
+            </a:pPr>
+            <a:r>
+              <a:rPr lang="en-US" sz="1700" dirty="0">
+                <a:solidFill>
+                  <a:srgbClr val="18181B"/>
+                </a:solidFill>
+                <a:latin typeface="IBM Plex Mono" pitchFamily="34" charset="0"/>
+                <a:ea typeface="IBM Plex Mono" pitchFamily="34" charset="-122"/>
+                <a:cs typeface="IBM Plex Mono" pitchFamily="34" charset="-120"/>
+              </a:rPr>
+              <a:t>score</a:t>
+            </a:r>
+            <a:pPr indent="0" marL="0">
+              <a:lnSpc>
+                <a:spcPct val="118000"/>
+              </a:lnSpc>
+              <a:buNone/>
+            </a:pPr>
+            <a:r>
+              <a:rPr lang="en-US" sz="1700" dirty="0">
+                <a:solidFill>
+                  <a:srgbClr val="18181B"/>
+                </a:solidFill>
+                <a:latin typeface="IBM Plex Mono" pitchFamily="34" charset="0"/>
+                <a:ea typeface="IBM Plex Mono" pitchFamily="34" charset="-122"/>
+                <a:cs typeface="IBM Plex Mono" pitchFamily="34" charset="-120"/>
+              </a:rPr>
+              <a:t> </a:t>
+            </a:r>
+            <a:pPr indent="0" marL="0">
+              <a:lnSpc>
+                <a:spcPct val="118000"/>
+              </a:lnSpc>
+              <a:buNone/>
+            </a:pPr>
+            <a:r>
+              <a:rPr lang="en-US" sz="1700" dirty="0">
+                <a:solidFill>
+                  <a:srgbClr val="3F3F46"/>
+                </a:solidFill>
+                <a:latin typeface="IBM Plex Mono" pitchFamily="34" charset="0"/>
+                <a:ea typeface="IBM Plex Mono" pitchFamily="34" charset="-122"/>
+                <a:cs typeface="IBM Plex Mono" pitchFamily="34" charset="-120"/>
+              </a:rPr>
+              <a:t>&gt;</a:t>
+            </a:r>
+            <a:pPr indent="0" marL="0">
+              <a:lnSpc>
+                <a:spcPct val="118000"/>
+              </a:lnSpc>
+              <a:buNone/>
+            </a:pPr>
+            <a:r>
+              <a:rPr lang="en-US" sz="1700" dirty="0">
+                <a:solidFill>
+                  <a:srgbClr val="18181B"/>
+                </a:solidFill>
+                <a:latin typeface="IBM Plex Mono" pitchFamily="34" charset="0"/>
+                <a:ea typeface="IBM Plex Mono" pitchFamily="34" charset="-122"/>
+                <a:cs typeface="IBM Plex Mono" pitchFamily="34" charset="-120"/>
+              </a:rPr>
+              <a:t> </a:t>
+            </a:r>
+            <a:pPr indent="0" marL="0">
+              <a:lnSpc>
+                <a:spcPct val="118000"/>
+              </a:lnSpc>
+              <a:buNone/>
+            </a:pPr>
+            <a:r>
+              <a:rPr lang="en-US" sz="1700" dirty="0">
+                <a:solidFill>
+                  <a:srgbClr val="9A3412"/>
+                </a:solidFill>
+                <a:latin typeface="IBM Plex Mono" pitchFamily="34" charset="0"/>
+                <a:ea typeface="IBM Plex Mono" pitchFamily="34" charset="-122"/>
+                <a:cs typeface="IBM Plex Mono" pitchFamily="34" charset="-120"/>
+              </a:rPr>
+              <a:t>1</a:t>
+            </a:r>
+            <a:pPr indent="0" marL="0">
+              <a:lnSpc>
+                <a:spcPct val="118000"/>
+              </a:lnSpc>
+              <a:buNone/>
+            </a:pPr>
+            <a:r>
+              <a:rPr lang="en-US" sz="1700" dirty="0">
+                <a:solidFill>
+                  <a:srgbClr val="18181B"/>
+                </a:solidFill>
+                <a:latin typeface="IBM Plex Mono" pitchFamily="34" charset="0"/>
+                <a:ea typeface="IBM Plex Mono" pitchFamily="34" charset="-122"/>
+                <a:cs typeface="IBM Plex Mono" pitchFamily="34" charset="-120"/>
+              </a:rPr>
+              <a:t> </a:t>
+            </a:r>
+            <a:pPr indent="0" marL="0">
+              <a:lnSpc>
+                <a:spcPct val="118000"/>
+              </a:lnSpc>
+              <a:buNone/>
+            </a:pPr>
+            <a:r>
+              <a:rPr lang="en-US" sz="1700" dirty="0">
+                <a:solidFill>
+                  <a:srgbClr val="6B21A8"/>
+                </a:solidFill>
+                <a:latin typeface="IBM Plex Mono" pitchFamily="34" charset="0"/>
+                <a:ea typeface="IBM Plex Mono" pitchFamily="34" charset="-122"/>
+                <a:cs typeface="IBM Plex Mono" pitchFamily="34" charset="-120"/>
+              </a:rPr>
+              <a:t>and</a:t>
+            </a:r>
+            <a:pPr indent="0" marL="0">
+              <a:lnSpc>
+                <a:spcPct val="118000"/>
+              </a:lnSpc>
+              <a:buNone/>
+            </a:pPr>
+            <a:r>
+              <a:rPr lang="en-US" sz="1700" dirty="0">
+                <a:solidFill>
+                  <a:srgbClr val="18181B"/>
+                </a:solidFill>
+                <a:latin typeface="IBM Plex Mono" pitchFamily="34" charset="0"/>
+                <a:ea typeface="IBM Plex Mono" pitchFamily="34" charset="-122"/>
+                <a:cs typeface="IBM Plex Mono" pitchFamily="34" charset="-120"/>
+              </a:rPr>
+              <a:t> </a:t>
+            </a:r>
+            <a:pPr indent="0" marL="0">
+              <a:lnSpc>
+                <a:spcPct val="118000"/>
+              </a:lnSpc>
+              <a:buNone/>
+            </a:pPr>
+            <a:r>
+              <a:rPr lang="en-US" sz="1700" dirty="0">
+                <a:solidFill>
+                  <a:srgbClr val="18181B"/>
+                </a:solidFill>
+                <a:latin typeface="IBM Plex Mono" pitchFamily="34" charset="0"/>
+                <a:ea typeface="IBM Plex Mono" pitchFamily="34" charset="-122"/>
+                <a:cs typeface="IBM Plex Mono" pitchFamily="34" charset="-120"/>
+              </a:rPr>
+              <a:t>score</a:t>
+            </a:r>
+            <a:pPr indent="0" marL="0">
+              <a:lnSpc>
+                <a:spcPct val="118000"/>
+              </a:lnSpc>
+              <a:buNone/>
+            </a:pPr>
+            <a:r>
+              <a:rPr lang="en-US" sz="1700" dirty="0">
+                <a:solidFill>
+                  <a:srgbClr val="18181B"/>
+                </a:solidFill>
+                <a:latin typeface="IBM Plex Mono" pitchFamily="34" charset="0"/>
+                <a:ea typeface="IBM Plex Mono" pitchFamily="34" charset="-122"/>
+                <a:cs typeface="IBM Plex Mono" pitchFamily="34" charset="-120"/>
+              </a:rPr>
+              <a:t> </a:t>
+            </a:r>
+            <a:pPr indent="0" marL="0">
+              <a:lnSpc>
+                <a:spcPct val="118000"/>
+              </a:lnSpc>
+              <a:buNone/>
+            </a:pPr>
+            <a:r>
+              <a:rPr lang="en-US" sz="1700" dirty="0">
+                <a:solidFill>
+                  <a:srgbClr val="3F3F46"/>
+                </a:solidFill>
+                <a:latin typeface="IBM Plex Mono" pitchFamily="34" charset="0"/>
+                <a:ea typeface="IBM Plex Mono" pitchFamily="34" charset="-122"/>
+                <a:cs typeface="IBM Plex Mono" pitchFamily="34" charset="-120"/>
+              </a:rPr>
+              <a:t>&lt;</a:t>
+            </a:r>
+            <a:pPr indent="0" marL="0">
+              <a:lnSpc>
+                <a:spcPct val="118000"/>
+              </a:lnSpc>
+              <a:buNone/>
+            </a:pPr>
+            <a:r>
+              <a:rPr lang="en-US" sz="1700" dirty="0">
+                <a:solidFill>
+                  <a:srgbClr val="18181B"/>
+                </a:solidFill>
+                <a:latin typeface="IBM Plex Mono" pitchFamily="34" charset="0"/>
+                <a:ea typeface="IBM Plex Mono" pitchFamily="34" charset="-122"/>
+                <a:cs typeface="IBM Plex Mono" pitchFamily="34" charset="-120"/>
+              </a:rPr>
+              <a:t> </a:t>
+            </a:r>
+            <a:pPr indent="0" marL="0">
+              <a:lnSpc>
+                <a:spcPct val="118000"/>
+              </a:lnSpc>
+              <a:buNone/>
+            </a:pPr>
+            <a:r>
+              <a:rPr lang="en-US" sz="1700" dirty="0">
+                <a:solidFill>
+                  <a:srgbClr val="9A3412"/>
+                </a:solidFill>
+                <a:latin typeface="IBM Plex Mono" pitchFamily="34" charset="0"/>
+                <a:ea typeface="IBM Plex Mono" pitchFamily="34" charset="-122"/>
+                <a:cs typeface="IBM Plex Mono" pitchFamily="34" charset="-120"/>
+              </a:rPr>
+              <a:t>10</a:t>
+            </a:r>
+            <a:pPr indent="0" marL="0">
+              <a:lnSpc>
+                <a:spcPct val="118000"/>
+              </a:lnSpc>
+              <a:buNone/>
+            </a:pPr>
+            <a:r>
+              <a:rPr lang="en-US" sz="1700" dirty="0">
+                <a:solidFill>
+                  <a:srgbClr val="101828"/>
+                </a:solidFill>
+                <a:latin typeface="IBM Plex Sans" pitchFamily="34" charset="0"/>
+                <a:ea typeface="IBM Plex Sans" pitchFamily="34" charset="-122"/>
+                <a:cs typeface="IBM Plex Sans" pitchFamily="34" charset="-120"/>
+              </a:rPr>
+              <a:t>. State the two scores this wrongly refuses, and write the condition corrected.</a:t>
             </a:r>
             <a:endParaRPr lang="en-US" sz="1700" dirty="0"/>
           </a:p>

--- a/presentations/PR_L12_ValidationAndAuthentication_Lesson.pptx
+++ b/presentations/PR_L12_ValidationAndAuthentication_Lesson.pptx
@@ -19,9 +19,10 @@
     <p:sldId id="267" r:id="rId13"/>
     <p:sldId id="268" r:id="rId14"/>
     <p:sldId id="269" r:id="rId15"/>
+    <p:sldId id="270" r:id="rId16"/>
   </p:sldIdLst>
   <p:notesMasterIdLst>
-    <p:notesMasterId r:id="rId16"/>
+    <p:notesMasterId r:id="rId17"/>
   </p:notesMasterIdLst>
   <p:sldSz cx="12192000" cy="6858000"/>
   <p:notesSz cx="6858000" cy="12192000"/>
@@ -692,7 +693,14 @@
           <a:p>
             <a:r>
               <a:rPr lang="en-US" dirty="0"/>
-              <a:t>Make them commit to an answer on paper before they tap the star. Guessing first costs them the learning.</a:t>
+              <a:t>The answer is A: try again
+done.
+Do not say it yet. Every pupil commits first - fingers, whiteboards or a show of hands on each letter in turn - and you count the split before anyone can change their mind.
+IF MOST OF THE CLASS IS RIGHT: say why it is right in one sentence and go straight on to the independent work.
+IF A SIGNIFICANT GROUP IS ON ONE WRONG LETTER: that option is the misconception to teach against before anyone goes on. Go back to station 4, Keeping asking, and work through its example again, aloud, with the class watching, then re-ask this question.
+The course's own response to a wrong answer here: One wrong line gives one message. The loop checks the new value before it decides whether to go round again.
+A limitation, stated rather than papered over: one response covers every wrong option; it does not say what to revisit for each one. The course does not record what each separate wrong option means, and this slide does not invent it. Decide your own reteach for each option before the lesson; the options above are the start of it.
+This is a real activity from the experience (pr-l12-s4-c2), so the wording here is the wording a pupil will see.</a:t>
             </a:r>
             <a:endParaRPr lang="en-US" dirty="0"/>
           </a:p>
@@ -780,7 +788,7 @@
           <a:p>
             <a:r>
               <a:rPr lang="en-US" dirty="0"/>
-              <a:t>Use these as a settler, or as something for early finishers to read in the experience.</a:t>
+              <a:t>Make them commit to an answer on paper before they tap the star. Guessing first costs them the learning.</a:t>
             </a:r>
             <a:endParaRPr lang="en-US" dirty="0"/>
           </a:p>
@@ -868,7 +876,7 @@
           <a:p>
             <a:r>
               <a:rPr lang="en-US" dirty="0"/>
-              <a:t>Timed and silent. Mark against the answer sheet, then ask students to record their weakest area.</a:t>
+              <a:t>Use these as a settler, or as something for early finishers to read in the experience.</a:t>
             </a:r>
             <a:endParaRPr lang="en-US" dirty="0"/>
           </a:p>
@@ -956,7 +964,7 @@
           <a:p>
             <a:r>
               <a:rPr lang="en-US" dirty="0"/>
-              <a:t>Students copy their score-screen breakdown onto the worksheet, then rate themselves here.</a:t>
+              <a:t>Timed and silent. Mark against the answer sheet, then ask students to record their weakest area.</a:t>
             </a:r>
             <a:endParaRPr lang="en-US" dirty="0"/>
           </a:p>
@@ -980,6 +988,94 @@
             <a:fld id="{F7021451-1387-4CA6-816F-3879F97B5CBC}" type="slidenum">
               <a:rPr lang="en-US"/>
               <a:t>14</a:t>
+            </a:fld>
+            <a:endParaRPr lang="en-US"/>
+          </a:p>
+        </p:txBody>
+      </p:sp>
+    </p:spTree>
+    <p:extLst>
+      <p:ext uri="{BB962C8B-B14F-4D97-AF65-F5344CB8AC3E}">
+        <p14:creationId xmlns:p14="http://schemas.microsoft.com/office/powerpoint/2010/main" val="1024086991"/>
+      </p:ext>
+    </p:extLst>
+  </p:cSld>
+  <p:clrMapOvr>
+    <a:masterClrMapping/>
+  </p:clrMapOvr>
+</p:notes>
+</file>
+
+<file path=ppt/notesSlides/notesSlide15.xml><?xml version="1.0" encoding="utf-8"?>
+<p:notes xmlns:a="http://schemas.openxmlformats.org/drawingml/2006/main" xmlns:r="http://schemas.openxmlformats.org/officeDocument/2006/relationships" xmlns:p="http://schemas.openxmlformats.org/presentationml/2006/main">
+  <p:cSld>
+    <p:spTree>
+      <p:nvGrpSpPr>
+        <p:cNvPr id="1" name=""/>
+        <p:cNvGrpSpPr/>
+        <p:nvPr/>
+      </p:nvGrpSpPr>
+      <p:grpSpPr>
+        <a:xfrm>
+          <a:off x="0" y="0"/>
+          <a:ext cx="0" cy="0"/>
+          <a:chOff x="0" y="0"/>
+          <a:chExt cx="0" cy="0"/>
+        </a:xfrm>
+      </p:grpSpPr>
+      <p:sp>
+        <p:nvSpPr>
+          <p:cNvPr id="2" name="Slide Image Placeholder 1"/>
+          <p:cNvSpPr>
+            <a:spLocks noGrp="1" noRot="1" noChangeAspect="1"/>
+          </p:cNvSpPr>
+          <p:nvPr>
+            <p:ph type="sldImg"/>
+          </p:nvPr>
+        </p:nvSpPr>
+        <p:spPr/>
+      </p:sp>
+      <p:sp>
+        <p:nvSpPr>
+          <p:cNvPr id="3" name="Notes Placeholder 2"/>
+          <p:cNvSpPr>
+            <a:spLocks noGrp="1"/>
+          </p:cNvSpPr>
+          <p:nvPr>
+            <p:ph type="body" idx="1"/>
+          </p:nvPr>
+        </p:nvSpPr>
+        <p:spPr/>
+        <p:txBody>
+          <a:bodyPr/>
+          <a:lstStyle/>
+          <a:p>
+            <a:r>
+              <a:rPr lang="en-US" dirty="0"/>
+              <a:t>Students copy their score-screen breakdown onto the worksheet, then rate themselves here.</a:t>
+            </a:r>
+            <a:endParaRPr lang="en-US" dirty="0"/>
+          </a:p>
+        </p:txBody>
+      </p:sp>
+      <p:sp>
+        <p:nvSpPr>
+          <p:cNvPr id="4" name="Slide Number Placeholder 3"/>
+          <p:cNvSpPr>
+            <a:spLocks noGrp="1"/>
+          </p:cNvSpPr>
+          <p:nvPr>
+            <p:ph type="sldNum" sz="quarter" idx="10"/>
+          </p:nvPr>
+        </p:nvSpPr>
+        <p:spPr/>
+        <p:txBody>
+          <a:bodyPr/>
+          <a:lstStyle/>
+          <a:p>
+            <a:fld id="{F7021451-1387-4CA6-816F-3879F97B5CBC}" type="slidenum">
+              <a:rPr lang="en-US"/>
+              <a:t>15</a:t>
             </a:fld>
             <a:endParaRPr lang="en-US"/>
           </a:p>
@@ -2949,12 +3045,12 @@
         </p:nvSpPr>
         <p:spPr>
           <a:xfrm>
-            <a:off x="502920" y="438912"/>
-            <a:ext cx="3108960" cy="502920"/>
+            <a:off x="502920" y="457200"/>
+            <a:ext cx="1051560" cy="420624"/>
           </a:xfrm>
           <a:prstGeom prst="roundRect">
             <a:avLst>
-              <a:gd name="adj" fmla="val 18182"/>
+              <a:gd name="adj" fmla="val 21739"/>
             </a:avLst>
           </a:prstGeom>
           <a:solidFill>
@@ -2971,8 +3067,8 @@
         </p:nvSpPr>
         <p:spPr>
           <a:xfrm>
-            <a:off x="502920" y="438912"/>
-            <a:ext cx="3108960" cy="502920"/>
+            <a:off x="502920" y="457200"/>
+            <a:ext cx="1051560" cy="420624"/>
           </a:xfrm>
           <a:prstGeom prst="rect">
             <a:avLst/>
@@ -2988,7 +3084,7 @@
               <a:buNone/>
             </a:pPr>
             <a:r>
-              <a:rPr lang="en-US" sz="1300" b="1" dirty="0">
+              <a:rPr lang="en-US" sz="1200" b="1" dirty="0">
                 <a:solidFill>
                   <a:srgbClr val="101828"/>
                 </a:solidFill>
@@ -2996,9 +3092,9 @@
                 <a:ea typeface="IBM Plex Mono" pitchFamily="34" charset="-122"/>
                 <a:cs typeface="IBM Plex Mono" pitchFamily="34" charset="-120"/>
               </a:rPr>
-              <a:t>★  FINAL CHALLENGE</a:t>
-            </a:r>
-            <a:endParaRPr lang="en-US" sz="1300" dirty="0"/>
+              <a:t>CHECK</a:t>
+            </a:r>
+            <a:endParaRPr lang="en-US" sz="1200" dirty="0"/>
           </a:p>
         </p:txBody>
       </p:sp>
@@ -3010,51 +3106,93 @@
         </p:nvSpPr>
         <p:spPr>
           <a:xfrm>
-            <a:off x="502920" y="1097280"/>
-            <a:ext cx="11155680" cy="731520"/>
-          </a:xfrm>
-          <a:prstGeom prst="rect">
-            <a:avLst/>
-          </a:prstGeom>
-          <a:noFill/>
-          <a:ln/>
-        </p:spPr>
-        <p:txBody>
-          <a:bodyPr wrap="square" lIns="0" tIns="0" rIns="0" bIns="0" rtlCol="0" anchor="ctr"/>
-          <a:lstStyle/>
-          <a:p>
-            <a:pPr indent="0" marL="0">
-              <a:buNone/>
-            </a:pPr>
-            <a:r>
-              <a:rPr lang="en-US" sz="3400" b="1" dirty="0">
-                <a:solidFill>
-                  <a:srgbClr val="101828"/>
+            <a:off x="1737360" y="457200"/>
+            <a:ext cx="9875520" cy="420624"/>
+          </a:xfrm>
+          <a:prstGeom prst="rect">
+            <a:avLst/>
+          </a:prstGeom>
+          <a:noFill/>
+          <a:ln/>
+        </p:spPr>
+        <p:txBody>
+          <a:bodyPr wrap="square" lIns="0" tIns="0" rIns="0" bIns="0" rtlCol="0" anchor="ctr"/>
+          <a:lstStyle/>
+          <a:p>
+            <a:pPr indent="0" marL="0">
+              <a:buNone/>
+            </a:pPr>
+            <a:r>
+              <a:rPr lang="en-US" sz="1500" dirty="0">
+                <a:solidFill>
+                  <a:srgbClr val="667085"/>
                 </a:solidFill>
                 <a:latin typeface="IBM Plex Sans" pitchFamily="34" charset="0"/>
                 <a:ea typeface="IBM Plex Sans" pitchFamily="34" charset="-122"/>
                 <a:cs typeface="IBM Plex Sans" pitchFamily="34" charset="-120"/>
               </a:rPr>
-              <a:t>Which check?</a:t>
-            </a:r>
-            <a:endParaRPr lang="en-US" sz="3400" dirty="0"/>
-          </a:p>
-        </p:txBody>
-      </p:sp>
-      <p:sp>
-        <p:nvSpPr>
-          <p:cNvPr id="8" name="Shape 6"/>
+              <a:t>Hands down. Everyone commits.</a:t>
+            </a:r>
+            <a:endParaRPr lang="en-US" sz="1500" dirty="0"/>
+          </a:p>
+        </p:txBody>
+      </p:sp>
+      <p:sp>
+        <p:nvSpPr>
+          <p:cNvPr id="8" name="Text 6"/>
+          <p:cNvSpPr txBox="1"/>
+          <p:nvPr/>
+        </p:nvSpPr>
+        <p:spPr>
+          <a:xfrm>
+            <a:off x="502920" y="1097280"/>
+            <a:ext cx="11155680" cy="914400"/>
+          </a:xfrm>
+          <a:prstGeom prst="rect">
+            <a:avLst/>
+          </a:prstGeom>
+          <a:noFill/>
+          <a:ln/>
+        </p:spPr>
+        <p:txBody>
+          <a:bodyPr wrap="square" lIns="0" tIns="0" rIns="0" bIns="0" rtlCol="0" anchor="ctr"/>
+          <a:lstStyle/>
+          <a:p>
+            <a:pPr indent="0" marL="0">
+              <a:lnSpc>
+                <a:spcPct val="115000"/>
+              </a:lnSpc>
+              <a:buNone/>
+            </a:pPr>
+            <a:r>
+              <a:rPr lang="en-US" sz="2600" b="1" dirty="0">
+                <a:solidFill>
+                  <a:srgbClr val="101828"/>
+                </a:solidFill>
+                <a:latin typeface="IBM Plex Sans" pitchFamily="34" charset="0"/>
+                <a:ea typeface="IBM Plex Sans" pitchFamily="34" charset="-122"/>
+                <a:cs typeface="IBM Plex Sans" pitchFamily="34" charset="-120"/>
+              </a:rPr>
+              <a:t>The user types 99 and then 5. What will this program display?</a:t>
+            </a:r>
+            <a:endParaRPr lang="en-US" sz="2600" dirty="0"/>
+          </a:p>
+        </p:txBody>
+      </p:sp>
+      <p:sp>
+        <p:nvSpPr>
+          <p:cNvPr id="9" name="Shape 7"/>
           <p:cNvSpPr/>
           <p:nvPr/>
         </p:nvSpPr>
         <p:spPr>
           <a:xfrm>
-            <a:off x="502920" y="2011680"/>
-            <a:ext cx="11155680" cy="2194560"/>
+            <a:off x="502920" y="2148840"/>
+            <a:ext cx="5029200" cy="1828800"/>
           </a:xfrm>
           <a:prstGeom prst="roundRect">
             <a:avLst>
-              <a:gd name="adj" fmla="val 5000"/>
+              <a:gd name="adj" fmla="val 6000"/>
             </a:avLst>
           </a:prstGeom>
           <a:solidFill>
@@ -3062,7 +3200,7 @@
           </a:solidFill>
           <a:ln w="15875">
             <a:solidFill>
-              <a:srgbClr val="2D63FF"/>
+              <a:srgbClr val="D9DEE7"/>
             </a:solidFill>
             <a:prstDash val="solid"/>
           </a:ln>
@@ -3070,33 +3208,243 @@
       </p:sp>
       <p:sp>
         <p:nvSpPr>
-          <p:cNvPr id="9" name="Text 7"/>
-          <p:cNvSpPr txBox="1"/>
-          <p:nvPr/>
-        </p:nvSpPr>
-        <p:spPr>
-          <a:xfrm>
-            <a:off x="1005840" y="2331720"/>
-            <a:ext cx="10149840" cy="1554480"/>
-          </a:xfrm>
-          <a:prstGeom prst="rect">
-            <a:avLst/>
-          </a:prstGeom>
-          <a:noFill/>
-          <a:ln/>
-        </p:spPr>
-        <p:txBody>
-          <a:bodyPr wrap="square" lIns="0" tIns="0" rIns="0" bIns="0" rtlCol="0" anchor="ctr"/>
+          <p:cNvPr id="10" name="Text 8"/>
+          <p:cNvSpPr txBox="1"/>
+          <p:nvPr/>
+        </p:nvSpPr>
+        <p:spPr>
+          <a:xfrm>
+            <a:off x="822960" y="2350008"/>
+            <a:ext cx="4480560" cy="1426464"/>
+          </a:xfrm>
+          <a:prstGeom prst="rect">
+            <a:avLst/>
+          </a:prstGeom>
+          <a:noFill/>
+          <a:ln/>
+        </p:spPr>
+        <p:txBody>
+          <a:bodyPr wrap="square" lIns="0" tIns="0" rIns="0" bIns="0" rtlCol="0" anchor="t"/>
           <a:lstStyle/>
           <a:p>
             <a:pPr indent="0" marL="0">
               <a:lnSpc>
-                <a:spcPct val="130000"/>
+                <a:spcPct val="125000"/>
               </a:lnSpc>
               <a:buNone/>
             </a:pPr>
             <a:r>
-              <a:rPr lang="en-US" sz="2200" dirty="0">
+              <a:rPr lang="en-US" sz="1500" dirty="0">
+                <a:solidFill>
+                  <a:srgbClr val="101828"/>
+                </a:solidFill>
+                <a:latin typeface="IBM Plex Mono" pitchFamily="34" charset="0"/>
+                <a:ea typeface="IBM Plex Mono" pitchFamily="34" charset="-122"/>
+                <a:cs typeface="IBM Plex Mono" pitchFamily="34" charset="-120"/>
+              </a:rPr>
+              <a:t>n = input()</a:t>
+            </a:r>
+            <a:endParaRPr lang="en-US" sz="1500" dirty="0"/>
+          </a:p>
+          <a:p>
+            <a:pPr indent="0" marL="0">
+              <a:lnSpc>
+                <a:spcPct val="125000"/>
+              </a:lnSpc>
+              <a:buNone/>
+            </a:pPr>
+            <a:r>
+              <a:rPr lang="en-US" sz="1500" dirty="0">
+                <a:solidFill>
+                  <a:srgbClr val="101828"/>
+                </a:solidFill>
+                <a:latin typeface="IBM Plex Mono" pitchFamily="34" charset="0"/>
+                <a:ea typeface="IBM Plex Mono" pitchFamily="34" charset="-122"/>
+                <a:cs typeface="IBM Plex Mono" pitchFamily="34" charset="-120"/>
+              </a:rPr>
+              <a:t>while n != "5":</a:t>
+            </a:r>
+            <a:endParaRPr lang="en-US" sz="1500" dirty="0"/>
+          </a:p>
+          <a:p>
+            <a:pPr indent="0" marL="0">
+              <a:lnSpc>
+                <a:spcPct val="125000"/>
+              </a:lnSpc>
+              <a:buNone/>
+            </a:pPr>
+            <a:r>
+              <a:rPr lang="en-US" sz="1500" dirty="0">
+                <a:solidFill>
+                  <a:srgbClr val="101828"/>
+                </a:solidFill>
+                <a:latin typeface="IBM Plex Mono" pitchFamily="34" charset="0"/>
+                <a:ea typeface="IBM Plex Mono" pitchFamily="34" charset="-122"/>
+                <a:cs typeface="IBM Plex Mono" pitchFamily="34" charset="-120"/>
+              </a:rPr>
+              <a:t>    print("try again")</a:t>
+            </a:r>
+            <a:endParaRPr lang="en-US" sz="1500" dirty="0"/>
+          </a:p>
+          <a:p>
+            <a:pPr indent="0" marL="0">
+              <a:lnSpc>
+                <a:spcPct val="125000"/>
+              </a:lnSpc>
+              <a:buNone/>
+            </a:pPr>
+            <a:r>
+              <a:rPr lang="en-US" sz="1500" dirty="0">
+                <a:solidFill>
+                  <a:srgbClr val="101828"/>
+                </a:solidFill>
+                <a:latin typeface="IBM Plex Mono" pitchFamily="34" charset="0"/>
+                <a:ea typeface="IBM Plex Mono" pitchFamily="34" charset="-122"/>
+                <a:cs typeface="IBM Plex Mono" pitchFamily="34" charset="-120"/>
+              </a:rPr>
+              <a:t>    n = input()</a:t>
+            </a:r>
+            <a:endParaRPr lang="en-US" sz="1500" dirty="0"/>
+          </a:p>
+          <a:p>
+            <a:pPr indent="0" marL="0">
+              <a:lnSpc>
+                <a:spcPct val="125000"/>
+              </a:lnSpc>
+              <a:buNone/>
+            </a:pPr>
+            <a:r>
+              <a:rPr lang="en-US" sz="1500" dirty="0">
+                <a:solidFill>
+                  <a:srgbClr val="101828"/>
+                </a:solidFill>
+                <a:latin typeface="IBM Plex Mono" pitchFamily="34" charset="0"/>
+                <a:ea typeface="IBM Plex Mono" pitchFamily="34" charset="-122"/>
+                <a:cs typeface="IBM Plex Mono" pitchFamily="34" charset="-120"/>
+              </a:rPr>
+              <a:t>print("done")</a:t>
+            </a:r>
+            <a:endParaRPr lang="en-US" sz="1500" dirty="0"/>
+          </a:p>
+        </p:txBody>
+      </p:sp>
+      <p:sp>
+        <p:nvSpPr>
+          <p:cNvPr id="11" name="Shape 9"/>
+          <p:cNvSpPr/>
+          <p:nvPr/>
+        </p:nvSpPr>
+        <p:spPr>
+          <a:xfrm>
+            <a:off x="5806440" y="2148840"/>
+            <a:ext cx="5852160" cy="731520"/>
+          </a:xfrm>
+          <a:prstGeom prst="roundRect">
+            <a:avLst>
+              <a:gd name="adj" fmla="val 15000"/>
+            </a:avLst>
+          </a:prstGeom>
+          <a:solidFill>
+            <a:srgbClr val="FFFFFF"/>
+          </a:solidFill>
+          <a:ln w="15875">
+            <a:solidFill>
+              <a:srgbClr val="D9DEE7"/>
+            </a:solidFill>
+            <a:prstDash val="solid"/>
+          </a:ln>
+        </p:spPr>
+      </p:sp>
+      <p:sp>
+        <p:nvSpPr>
+          <p:cNvPr id="12" name="Shape 10"/>
+          <p:cNvSpPr/>
+          <p:nvPr/>
+        </p:nvSpPr>
+        <p:spPr>
+          <a:xfrm>
+            <a:off x="6080760" y="2295144"/>
+            <a:ext cx="438912" cy="438912"/>
+          </a:xfrm>
+          <a:prstGeom prst="roundRect">
+            <a:avLst>
+              <a:gd name="adj" fmla="val 20833"/>
+            </a:avLst>
+          </a:prstGeom>
+          <a:solidFill>
+            <a:srgbClr val="EEF2FB"/>
+          </a:solidFill>
+          <a:ln/>
+        </p:spPr>
+      </p:sp>
+      <p:sp>
+        <p:nvSpPr>
+          <p:cNvPr id="13" name="Text 11"/>
+          <p:cNvSpPr txBox="1"/>
+          <p:nvPr/>
+        </p:nvSpPr>
+        <p:spPr>
+          <a:xfrm>
+            <a:off x="6080760" y="2295144"/>
+            <a:ext cx="438912" cy="438912"/>
+          </a:xfrm>
+          <a:prstGeom prst="rect">
+            <a:avLst/>
+          </a:prstGeom>
+          <a:noFill/>
+          <a:ln/>
+        </p:spPr>
+        <p:txBody>
+          <a:bodyPr wrap="square" lIns="0" tIns="0" rIns="0" bIns="0" rtlCol="0" anchor="ctr"/>
+          <a:lstStyle/>
+          <a:p>
+            <a:pPr algn="ctr" indent="0" marL="0">
+              <a:buNone/>
+            </a:pPr>
+            <a:r>
+              <a:rPr lang="en-US" sz="1300" b="1" dirty="0">
+                <a:solidFill>
+                  <a:srgbClr val="2D63FF"/>
+                </a:solidFill>
+                <a:latin typeface="IBM Plex Mono" pitchFamily="34" charset="0"/>
+                <a:ea typeface="IBM Plex Mono" pitchFamily="34" charset="-122"/>
+                <a:cs typeface="IBM Plex Mono" pitchFamily="34" charset="-120"/>
+              </a:rPr>
+              <a:t>A</a:t>
+            </a:r>
+            <a:endParaRPr lang="en-US" sz="1300" dirty="0"/>
+          </a:p>
+        </p:txBody>
+      </p:sp>
+      <p:sp>
+        <p:nvSpPr>
+          <p:cNvPr id="14" name="Text 12"/>
+          <p:cNvSpPr txBox="1"/>
+          <p:nvPr/>
+        </p:nvSpPr>
+        <p:spPr>
+          <a:xfrm>
+            <a:off x="6720840" y="2148840"/>
+            <a:ext cx="4754880" cy="731520"/>
+          </a:xfrm>
+          <a:prstGeom prst="rect">
+            <a:avLst/>
+          </a:prstGeom>
+          <a:noFill/>
+          <a:ln/>
+        </p:spPr>
+        <p:txBody>
+          <a:bodyPr wrap="square" lIns="0" tIns="0" rIns="0" bIns="0" rtlCol="0" anchor="ctr"/>
+          <a:lstStyle/>
+          <a:p>
+            <a:pPr indent="0" marL="0">
+              <a:lnSpc>
+                <a:spcPct val="115000"/>
+              </a:lnSpc>
+              <a:buNone/>
+            </a:pPr>
+            <a:r>
+              <a:rPr lang="en-US" sz="1700" dirty="0">
                 <a:solidFill>
                   <a:srgbClr val="101828"/>
                 </a:solidFill>
@@ -3104,48 +3452,329 @@
                 <a:ea typeface="IBM Plex Sans" pitchFamily="34" charset="-122"/>
                 <a:cs typeface="IBM Plex Sans" pitchFamily="34" charset="-120"/>
               </a:rPr>
-              <a:t>Eight rules are listed on the floor below you. Tap the star and sort each one into the kind of check it is.</a:t>
-            </a:r>
-            <a:endParaRPr lang="en-US" sz="2200" dirty="0"/>
-          </a:p>
-        </p:txBody>
-      </p:sp>
-      <p:sp>
-        <p:nvSpPr>
-          <p:cNvPr id="10" name="Text 8"/>
-          <p:cNvSpPr txBox="1"/>
-          <p:nvPr/>
-        </p:nvSpPr>
-        <p:spPr>
-          <a:xfrm>
-            <a:off x="502920" y="4526280"/>
-            <a:ext cx="11155680" cy="457200"/>
-          </a:xfrm>
-          <a:prstGeom prst="rect">
-            <a:avLst/>
-          </a:prstGeom>
-          <a:noFill/>
-          <a:ln/>
-        </p:spPr>
-        <p:txBody>
-          <a:bodyPr wrap="square" lIns="0" tIns="0" rIns="0" bIns="0" rtlCol="0" anchor="ctr"/>
-          <a:lstStyle/>
-          <a:p>
-            <a:pPr indent="0" marL="0">
-              <a:buNone/>
-            </a:pPr>
-            <a:r>
-              <a:rPr lang="en-US" sz="1600" dirty="0">
-                <a:solidFill>
-                  <a:srgbClr val="667085"/>
+              <a:t>try again</a:t>
+            </a:r>
+            <a:endParaRPr lang="en-US" sz="1700" dirty="0"/>
+          </a:p>
+          <a:p>
+            <a:pPr indent="0" marL="0">
+              <a:lnSpc>
+                <a:spcPct val="115000"/>
+              </a:lnSpc>
+              <a:buNone/>
+            </a:pPr>
+            <a:r>
+              <a:rPr lang="en-US" sz="1700" dirty="0">
+                <a:solidFill>
+                  <a:srgbClr val="101828"/>
                 </a:solidFill>
                 <a:latin typeface="IBM Plex Sans" pitchFamily="34" charset="0"/>
                 <a:ea typeface="IBM Plex Sans" pitchFamily="34" charset="-122"/>
                 <a:cs typeface="IBM Plex Sans" pitchFamily="34" charset="-120"/>
               </a:rPr>
-              <a:t>Predict on paper first, then look down and test it.</a:t>
-            </a:r>
-            <a:endParaRPr lang="en-US" sz="1600" dirty="0"/>
+              <a:t>done</a:t>
+            </a:r>
+            <a:endParaRPr lang="en-US" sz="1700" dirty="0"/>
+          </a:p>
+        </p:txBody>
+      </p:sp>
+      <p:sp>
+        <p:nvSpPr>
+          <p:cNvPr id="15" name="Shape 13"/>
+          <p:cNvSpPr/>
+          <p:nvPr/>
+        </p:nvSpPr>
+        <p:spPr>
+          <a:xfrm>
+            <a:off x="5806440" y="3017520"/>
+            <a:ext cx="5852160" cy="731520"/>
+          </a:xfrm>
+          <a:prstGeom prst="roundRect">
+            <a:avLst>
+              <a:gd name="adj" fmla="val 15000"/>
+            </a:avLst>
+          </a:prstGeom>
+          <a:solidFill>
+            <a:srgbClr val="FFFFFF"/>
+          </a:solidFill>
+          <a:ln w="15875">
+            <a:solidFill>
+              <a:srgbClr val="D9DEE7"/>
+            </a:solidFill>
+            <a:prstDash val="solid"/>
+          </a:ln>
+        </p:spPr>
+      </p:sp>
+      <p:sp>
+        <p:nvSpPr>
+          <p:cNvPr id="16" name="Shape 14"/>
+          <p:cNvSpPr/>
+          <p:nvPr/>
+        </p:nvSpPr>
+        <p:spPr>
+          <a:xfrm>
+            <a:off x="6080760" y="3163824"/>
+            <a:ext cx="438912" cy="438912"/>
+          </a:xfrm>
+          <a:prstGeom prst="roundRect">
+            <a:avLst>
+              <a:gd name="adj" fmla="val 20833"/>
+            </a:avLst>
+          </a:prstGeom>
+          <a:solidFill>
+            <a:srgbClr val="EEF2FB"/>
+          </a:solidFill>
+          <a:ln/>
+        </p:spPr>
+      </p:sp>
+      <p:sp>
+        <p:nvSpPr>
+          <p:cNvPr id="17" name="Text 15"/>
+          <p:cNvSpPr txBox="1"/>
+          <p:nvPr/>
+        </p:nvSpPr>
+        <p:spPr>
+          <a:xfrm>
+            <a:off x="6080760" y="3163824"/>
+            <a:ext cx="438912" cy="438912"/>
+          </a:xfrm>
+          <a:prstGeom prst="rect">
+            <a:avLst/>
+          </a:prstGeom>
+          <a:noFill/>
+          <a:ln/>
+        </p:spPr>
+        <p:txBody>
+          <a:bodyPr wrap="square" lIns="0" tIns="0" rIns="0" bIns="0" rtlCol="0" anchor="ctr"/>
+          <a:lstStyle/>
+          <a:p>
+            <a:pPr algn="ctr" indent="0" marL="0">
+              <a:buNone/>
+            </a:pPr>
+            <a:r>
+              <a:rPr lang="en-US" sz="1300" b="1" dirty="0">
+                <a:solidFill>
+                  <a:srgbClr val="2D63FF"/>
+                </a:solidFill>
+                <a:latin typeface="IBM Plex Mono" pitchFamily="34" charset="0"/>
+                <a:ea typeface="IBM Plex Mono" pitchFamily="34" charset="-122"/>
+                <a:cs typeface="IBM Plex Mono" pitchFamily="34" charset="-120"/>
+              </a:rPr>
+              <a:t>B</a:t>
+            </a:r>
+            <a:endParaRPr lang="en-US" sz="1300" dirty="0"/>
+          </a:p>
+        </p:txBody>
+      </p:sp>
+      <p:sp>
+        <p:nvSpPr>
+          <p:cNvPr id="18" name="Text 16"/>
+          <p:cNvSpPr txBox="1"/>
+          <p:nvPr/>
+        </p:nvSpPr>
+        <p:spPr>
+          <a:xfrm>
+            <a:off x="6720840" y="3017520"/>
+            <a:ext cx="4754880" cy="731520"/>
+          </a:xfrm>
+          <a:prstGeom prst="rect">
+            <a:avLst/>
+          </a:prstGeom>
+          <a:noFill/>
+          <a:ln/>
+        </p:spPr>
+        <p:txBody>
+          <a:bodyPr wrap="square" lIns="0" tIns="0" rIns="0" bIns="0" rtlCol="0" anchor="ctr"/>
+          <a:lstStyle/>
+          <a:p>
+            <a:pPr indent="0" marL="0">
+              <a:lnSpc>
+                <a:spcPct val="115000"/>
+              </a:lnSpc>
+              <a:buNone/>
+            </a:pPr>
+            <a:r>
+              <a:rPr lang="en-US" sz="1700" dirty="0">
+                <a:solidFill>
+                  <a:srgbClr val="101828"/>
+                </a:solidFill>
+                <a:latin typeface="IBM Plex Sans" pitchFamily="34" charset="0"/>
+                <a:ea typeface="IBM Plex Sans" pitchFamily="34" charset="-122"/>
+                <a:cs typeface="IBM Plex Sans" pitchFamily="34" charset="-120"/>
+              </a:rPr>
+              <a:t>done</a:t>
+            </a:r>
+            <a:endParaRPr lang="en-US" sz="1700" dirty="0"/>
+          </a:p>
+        </p:txBody>
+      </p:sp>
+      <p:sp>
+        <p:nvSpPr>
+          <p:cNvPr id="19" name="Shape 17"/>
+          <p:cNvSpPr/>
+          <p:nvPr/>
+        </p:nvSpPr>
+        <p:spPr>
+          <a:xfrm>
+            <a:off x="5806440" y="3886200"/>
+            <a:ext cx="5852160" cy="731520"/>
+          </a:xfrm>
+          <a:prstGeom prst="roundRect">
+            <a:avLst>
+              <a:gd name="adj" fmla="val 15000"/>
+            </a:avLst>
+          </a:prstGeom>
+          <a:solidFill>
+            <a:srgbClr val="FFFFFF"/>
+          </a:solidFill>
+          <a:ln w="15875">
+            <a:solidFill>
+              <a:srgbClr val="D9DEE7"/>
+            </a:solidFill>
+            <a:prstDash val="solid"/>
+          </a:ln>
+        </p:spPr>
+      </p:sp>
+      <p:sp>
+        <p:nvSpPr>
+          <p:cNvPr id="20" name="Shape 18"/>
+          <p:cNvSpPr/>
+          <p:nvPr/>
+        </p:nvSpPr>
+        <p:spPr>
+          <a:xfrm>
+            <a:off x="6080760" y="4032504"/>
+            <a:ext cx="438912" cy="438912"/>
+          </a:xfrm>
+          <a:prstGeom prst="roundRect">
+            <a:avLst>
+              <a:gd name="adj" fmla="val 20833"/>
+            </a:avLst>
+          </a:prstGeom>
+          <a:solidFill>
+            <a:srgbClr val="EEF2FB"/>
+          </a:solidFill>
+          <a:ln/>
+        </p:spPr>
+      </p:sp>
+      <p:sp>
+        <p:nvSpPr>
+          <p:cNvPr id="21" name="Text 19"/>
+          <p:cNvSpPr txBox="1"/>
+          <p:nvPr/>
+        </p:nvSpPr>
+        <p:spPr>
+          <a:xfrm>
+            <a:off x="6080760" y="4032504"/>
+            <a:ext cx="438912" cy="438912"/>
+          </a:xfrm>
+          <a:prstGeom prst="rect">
+            <a:avLst/>
+          </a:prstGeom>
+          <a:noFill/>
+          <a:ln/>
+        </p:spPr>
+        <p:txBody>
+          <a:bodyPr wrap="square" lIns="0" tIns="0" rIns="0" bIns="0" rtlCol="0" anchor="ctr"/>
+          <a:lstStyle/>
+          <a:p>
+            <a:pPr algn="ctr" indent="0" marL="0">
+              <a:buNone/>
+            </a:pPr>
+            <a:r>
+              <a:rPr lang="en-US" sz="1300" b="1" dirty="0">
+                <a:solidFill>
+                  <a:srgbClr val="2D63FF"/>
+                </a:solidFill>
+                <a:latin typeface="IBM Plex Mono" pitchFamily="34" charset="0"/>
+                <a:ea typeface="IBM Plex Mono" pitchFamily="34" charset="-122"/>
+                <a:cs typeface="IBM Plex Mono" pitchFamily="34" charset="-120"/>
+              </a:rPr>
+              <a:t>C</a:t>
+            </a:r>
+            <a:endParaRPr lang="en-US" sz="1300" dirty="0"/>
+          </a:p>
+        </p:txBody>
+      </p:sp>
+      <p:sp>
+        <p:nvSpPr>
+          <p:cNvPr id="22" name="Text 20"/>
+          <p:cNvSpPr txBox="1"/>
+          <p:nvPr/>
+        </p:nvSpPr>
+        <p:spPr>
+          <a:xfrm>
+            <a:off x="6720840" y="3886200"/>
+            <a:ext cx="4754880" cy="731520"/>
+          </a:xfrm>
+          <a:prstGeom prst="rect">
+            <a:avLst/>
+          </a:prstGeom>
+          <a:noFill/>
+          <a:ln/>
+        </p:spPr>
+        <p:txBody>
+          <a:bodyPr wrap="square" lIns="0" tIns="0" rIns="0" bIns="0" rtlCol="0" anchor="ctr"/>
+          <a:lstStyle/>
+          <a:p>
+            <a:pPr indent="0" marL="0">
+              <a:lnSpc>
+                <a:spcPct val="115000"/>
+              </a:lnSpc>
+              <a:buNone/>
+            </a:pPr>
+            <a:r>
+              <a:rPr lang="en-US" sz="1700" dirty="0">
+                <a:solidFill>
+                  <a:srgbClr val="101828"/>
+                </a:solidFill>
+                <a:latin typeface="IBM Plex Sans" pitchFamily="34" charset="0"/>
+                <a:ea typeface="IBM Plex Sans" pitchFamily="34" charset="-122"/>
+                <a:cs typeface="IBM Plex Sans" pitchFamily="34" charset="-120"/>
+              </a:rPr>
+              <a:t>try again</a:t>
+            </a:r>
+            <a:endParaRPr lang="en-US" sz="1700" dirty="0"/>
+          </a:p>
+          <a:p>
+            <a:pPr indent="0" marL="0">
+              <a:lnSpc>
+                <a:spcPct val="115000"/>
+              </a:lnSpc>
+              <a:buNone/>
+            </a:pPr>
+            <a:r>
+              <a:rPr lang="en-US" sz="1700" dirty="0">
+                <a:solidFill>
+                  <a:srgbClr val="101828"/>
+                </a:solidFill>
+                <a:latin typeface="IBM Plex Sans" pitchFamily="34" charset="0"/>
+                <a:ea typeface="IBM Plex Sans" pitchFamily="34" charset="-122"/>
+                <a:cs typeface="IBM Plex Sans" pitchFamily="34" charset="-120"/>
+              </a:rPr>
+              <a:t>try again</a:t>
+            </a:r>
+            <a:endParaRPr lang="en-US" sz="1700" dirty="0"/>
+          </a:p>
+          <a:p>
+            <a:pPr indent="0" marL="0">
+              <a:lnSpc>
+                <a:spcPct val="115000"/>
+              </a:lnSpc>
+              <a:buNone/>
+            </a:pPr>
+            <a:r>
+              <a:rPr lang="en-US" sz="1700" dirty="0">
+                <a:solidFill>
+                  <a:srgbClr val="101828"/>
+                </a:solidFill>
+                <a:latin typeface="IBM Plex Sans" pitchFamily="34" charset="0"/>
+                <a:ea typeface="IBM Plex Sans" pitchFamily="34" charset="-122"/>
+                <a:cs typeface="IBM Plex Sans" pitchFamily="34" charset="-120"/>
+              </a:rPr>
+              <a:t>done</a:t>
+            </a:r>
+            <a:endParaRPr lang="en-US" sz="1700" dirty="0"/>
           </a:p>
         </p:txBody>
       </p:sp>
@@ -3281,30 +3910,91 @@
       </p:sp>
       <p:sp>
         <p:nvSpPr>
-          <p:cNvPr id="5" name="Text 3"/>
-          <p:cNvSpPr txBox="1"/>
-          <p:nvPr/>
-        </p:nvSpPr>
-        <p:spPr>
-          <a:xfrm>
-            <a:off x="502920" y="411480"/>
-            <a:ext cx="11155680" cy="777240"/>
-          </a:xfrm>
-          <a:prstGeom prst="rect">
-            <a:avLst/>
-          </a:prstGeom>
-          <a:noFill/>
-          <a:ln/>
-        </p:spPr>
-        <p:txBody>
-          <a:bodyPr wrap="square" lIns="0" tIns="0" rIns="0" bIns="0" rtlCol="0" anchor="ctr"/>
-          <a:lstStyle/>
-          <a:p>
-            <a:pPr indent="0" marL="0">
-              <a:buNone/>
-            </a:pPr>
-            <a:r>
-              <a:rPr lang="en-US" sz="3200" b="1" dirty="0">
+          <p:cNvPr id="5" name="Shape 3"/>
+          <p:cNvSpPr/>
+          <p:nvPr/>
+        </p:nvSpPr>
+        <p:spPr>
+          <a:xfrm>
+            <a:off x="502920" y="438912"/>
+            <a:ext cx="3108960" cy="502920"/>
+          </a:xfrm>
+          <a:prstGeom prst="roundRect">
+            <a:avLst>
+              <a:gd name="adj" fmla="val 18182"/>
+            </a:avLst>
+          </a:prstGeom>
+          <a:solidFill>
+            <a:srgbClr val="F4B942"/>
+          </a:solidFill>
+          <a:ln/>
+        </p:spPr>
+      </p:sp>
+      <p:sp>
+        <p:nvSpPr>
+          <p:cNvPr id="6" name="Text 4"/>
+          <p:cNvSpPr txBox="1"/>
+          <p:nvPr/>
+        </p:nvSpPr>
+        <p:spPr>
+          <a:xfrm>
+            <a:off x="502920" y="438912"/>
+            <a:ext cx="3108960" cy="502920"/>
+          </a:xfrm>
+          <a:prstGeom prst="rect">
+            <a:avLst/>
+          </a:prstGeom>
+          <a:noFill/>
+          <a:ln/>
+        </p:spPr>
+        <p:txBody>
+          <a:bodyPr wrap="square" lIns="0" tIns="0" rIns="0" bIns="0" rtlCol="0" anchor="ctr"/>
+          <a:lstStyle/>
+          <a:p>
+            <a:pPr algn="ctr" indent="0" marL="0">
+              <a:buNone/>
+            </a:pPr>
+            <a:r>
+              <a:rPr lang="en-US" sz="1300" b="1" dirty="0">
+                <a:solidFill>
+                  <a:srgbClr val="101828"/>
+                </a:solidFill>
+                <a:latin typeface="IBM Plex Mono" pitchFamily="34" charset="0"/>
+                <a:ea typeface="IBM Plex Mono" pitchFamily="34" charset="-122"/>
+                <a:cs typeface="IBM Plex Mono" pitchFamily="34" charset="-120"/>
+              </a:rPr>
+              <a:t>★  FINAL CHALLENGE</a:t>
+            </a:r>
+            <a:endParaRPr lang="en-US" sz="1300" dirty="0"/>
+          </a:p>
+        </p:txBody>
+      </p:sp>
+      <p:sp>
+        <p:nvSpPr>
+          <p:cNvPr id="7" name="Text 5"/>
+          <p:cNvSpPr txBox="1"/>
+          <p:nvPr/>
+        </p:nvSpPr>
+        <p:spPr>
+          <a:xfrm>
+            <a:off x="502920" y="1097280"/>
+            <a:ext cx="11155680" cy="731520"/>
+          </a:xfrm>
+          <a:prstGeom prst="rect">
+            <a:avLst/>
+          </a:prstGeom>
+          <a:noFill/>
+          <a:ln/>
+        </p:spPr>
+        <p:txBody>
+          <a:bodyPr wrap="square" lIns="0" tIns="0" rIns="0" bIns="0" rtlCol="0" anchor="ctr"/>
+          <a:lstStyle/>
+          <a:p>
+            <a:pPr indent="0" marL="0">
+              <a:buNone/>
+            </a:pPr>
+            <a:r>
+              <a:rPr lang="en-US" sz="3400" b="1" dirty="0">
                 <a:solidFill>
                   <a:srgbClr val="101828"/>
                 </a:solidFill>
@@ -3312,65 +4002,26 @@
                 <a:ea typeface="IBM Plex Sans" pitchFamily="34" charset="-122"/>
                 <a:cs typeface="IBM Plex Sans" pitchFamily="34" charset="-120"/>
               </a:rPr>
-              <a:t>Worth knowing</a:t>
-            </a:r>
-            <a:endParaRPr lang="en-US" sz="3200" dirty="0"/>
-          </a:p>
-        </p:txBody>
-      </p:sp>
-      <p:sp>
-        <p:nvSpPr>
-          <p:cNvPr id="6" name="Text 4"/>
-          <p:cNvSpPr txBox="1"/>
-          <p:nvPr/>
-        </p:nvSpPr>
-        <p:spPr>
-          <a:xfrm>
-            <a:off x="502920" y="1170432"/>
-            <a:ext cx="11155680" cy="411480"/>
-          </a:xfrm>
-          <a:prstGeom prst="rect">
-            <a:avLst/>
-          </a:prstGeom>
-          <a:noFill/>
-          <a:ln/>
-        </p:spPr>
-        <p:txBody>
-          <a:bodyPr wrap="square" lIns="0" tIns="0" rIns="0" bIns="0" rtlCol="0" anchor="ctr"/>
-          <a:lstStyle/>
-          <a:p>
-            <a:pPr indent="0" marL="0">
-              <a:buNone/>
-            </a:pPr>
-            <a:r>
-              <a:rPr lang="en-US" sz="1500" dirty="0">
-                <a:solidFill>
-                  <a:srgbClr val="667085"/>
-                </a:solidFill>
-                <a:latin typeface="IBM Plex Sans" pitchFamily="34" charset="0"/>
-                <a:ea typeface="IBM Plex Sans" pitchFamily="34" charset="-122"/>
-                <a:cs typeface="IBM Plex Sans" pitchFamily="34" charset="-120"/>
-              </a:rPr>
-              <a:t>The information markers dotted around the room</a:t>
-            </a:r>
-            <a:endParaRPr lang="en-US" sz="1500" dirty="0"/>
-          </a:p>
-        </p:txBody>
-      </p:sp>
-      <p:sp>
-        <p:nvSpPr>
-          <p:cNvPr id="7" name="Shape 5"/>
+              <a:t>Which check?</a:t>
+            </a:r>
+            <a:endParaRPr lang="en-US" sz="3400" dirty="0"/>
+          </a:p>
+        </p:txBody>
+      </p:sp>
+      <p:sp>
+        <p:nvSpPr>
+          <p:cNvPr id="8" name="Shape 6"/>
           <p:cNvSpPr/>
           <p:nvPr/>
         </p:nvSpPr>
         <p:spPr>
           <a:xfrm>
-            <a:off x="502920" y="1828800"/>
-            <a:ext cx="5394960" cy="1737360"/>
+            <a:off x="502920" y="2011680"/>
+            <a:ext cx="11155680" cy="2194560"/>
           </a:xfrm>
           <a:prstGeom prst="roundRect">
             <a:avLst>
-              <a:gd name="adj" fmla="val 6316"/>
+              <a:gd name="adj" fmla="val 5000"/>
             </a:avLst>
           </a:prstGeom>
           <a:solidFill>
@@ -3386,72 +4037,72 @@
       </p:sp>
       <p:sp>
         <p:nvSpPr>
-          <p:cNvPr id="8" name="Text 6"/>
-          <p:cNvSpPr txBox="1"/>
-          <p:nvPr/>
-        </p:nvSpPr>
-        <p:spPr>
-          <a:xfrm>
-            <a:off x="822960" y="2011680"/>
-            <a:ext cx="4754880" cy="365760"/>
-          </a:xfrm>
-          <a:prstGeom prst="rect">
-            <a:avLst/>
-          </a:prstGeom>
-          <a:noFill/>
-          <a:ln/>
-        </p:spPr>
-        <p:txBody>
-          <a:bodyPr wrap="square" lIns="0" tIns="0" rIns="0" bIns="0" rtlCol="0" anchor="ctr"/>
-          <a:lstStyle/>
-          <a:p>
-            <a:pPr indent="0" marL="0">
-              <a:buNone/>
-            </a:pPr>
-            <a:r>
-              <a:rPr lang="en-US" sz="1600" b="1" dirty="0">
-                <a:solidFill>
-                  <a:srgbClr val="2D63FF"/>
+          <p:cNvPr id="9" name="Text 7"/>
+          <p:cNvSpPr txBox="1"/>
+          <p:nvPr/>
+        </p:nvSpPr>
+        <p:spPr>
+          <a:xfrm>
+            <a:off x="1005840" y="2331720"/>
+            <a:ext cx="10149840" cy="1554480"/>
+          </a:xfrm>
+          <a:prstGeom prst="rect">
+            <a:avLst/>
+          </a:prstGeom>
+          <a:noFill/>
+          <a:ln/>
+        </p:spPr>
+        <p:txBody>
+          <a:bodyPr wrap="square" lIns="0" tIns="0" rIns="0" bIns="0" rtlCol="0" anchor="ctr"/>
+          <a:lstStyle/>
+          <a:p>
+            <a:pPr indent="0" marL="0">
+              <a:lnSpc>
+                <a:spcPct val="130000"/>
+              </a:lnSpc>
+              <a:buNone/>
+            </a:pPr>
+            <a:r>
+              <a:rPr lang="en-US" sz="2200" dirty="0">
+                <a:solidFill>
+                  <a:srgbClr val="101828"/>
                 </a:solidFill>
                 <a:latin typeface="IBM Plex Sans" pitchFamily="34" charset="0"/>
                 <a:ea typeface="IBM Plex Sans" pitchFamily="34" charset="-122"/>
                 <a:cs typeface="IBM Plex Sans" pitchFamily="34" charset="-120"/>
               </a:rPr>
-              <a:t>A list of allowed values</a:t>
-            </a:r>
-            <a:endParaRPr lang="en-US" sz="1600" dirty="0"/>
-          </a:p>
-        </p:txBody>
-      </p:sp>
-      <p:sp>
-        <p:nvSpPr>
-          <p:cNvPr id="9" name="Text 7"/>
-          <p:cNvSpPr txBox="1"/>
-          <p:nvPr/>
-        </p:nvSpPr>
-        <p:spPr>
-          <a:xfrm>
-            <a:off x="822960" y="2395728"/>
-            <a:ext cx="4754880" cy="1005840"/>
-          </a:xfrm>
-          <a:prstGeom prst="rect">
-            <a:avLst/>
-          </a:prstGeom>
-          <a:noFill/>
-          <a:ln/>
-        </p:spPr>
-        <p:txBody>
-          <a:bodyPr wrap="square" lIns="0" tIns="0" rIns="0" bIns="0" rtlCol="0" anchor="t"/>
-          <a:lstStyle/>
-          <a:p>
-            <a:pPr indent="0" marL="0">
-              <a:lnSpc>
-                <a:spcPct val="120000"/>
-              </a:lnSpc>
-              <a:buNone/>
-            </a:pPr>
-            <a:r>
-              <a:rPr lang="en-US" sz="1300" dirty="0">
+              <a:t>Eight rules are listed on the floor below you. Tap the star and sort each one into the kind of check it is.</a:t>
+            </a:r>
+            <a:endParaRPr lang="en-US" sz="2200" dirty="0"/>
+          </a:p>
+        </p:txBody>
+      </p:sp>
+      <p:sp>
+        <p:nvSpPr>
+          <p:cNvPr id="10" name="Text 8"/>
+          <p:cNvSpPr txBox="1"/>
+          <p:nvPr/>
+        </p:nvSpPr>
+        <p:spPr>
+          <a:xfrm>
+            <a:off x="502920" y="4526280"/>
+            <a:ext cx="11155680" cy="457200"/>
+          </a:xfrm>
+          <a:prstGeom prst="rect">
+            <a:avLst/>
+          </a:prstGeom>
+          <a:noFill/>
+          <a:ln/>
+        </p:spPr>
+        <p:txBody>
+          <a:bodyPr wrap="square" lIns="0" tIns="0" rIns="0" bIns="0" rtlCol="0" anchor="ctr"/>
+          <a:lstStyle/>
+          <a:p>
+            <a:pPr indent="0" marL="0">
+              <a:buNone/>
+            </a:pPr>
+            <a:r>
+              <a:rPr lang="en-US" sz="1600" dirty="0">
                 <a:solidFill>
                   <a:srgbClr val="667085"/>
                 </a:solidFill>
@@ -3459,333 +4110,9 @@
                 <a:ea typeface="IBM Plex Sans" pitchFamily="34" charset="-122"/>
                 <a:cs typeface="IBM Plex Sans" pitchFamily="34" charset="-120"/>
               </a:rPr>
-              <a:t>Some values are only valid if they appear on a list the program already holds, which is a lookup check. Comparing exactly means one capital letter makes a value unknown, so decide whether to lower() both sides first.</a:t>
-            </a:r>
-            <a:endParaRPr lang="en-US" sz="1300" dirty="0"/>
-          </a:p>
-        </p:txBody>
-      </p:sp>
-      <p:sp>
-        <p:nvSpPr>
-          <p:cNvPr id="10" name="Shape 8"/>
-          <p:cNvSpPr/>
-          <p:nvPr/>
-        </p:nvSpPr>
-        <p:spPr>
-          <a:xfrm>
-            <a:off x="6217920" y="1828800"/>
-            <a:ext cx="5394960" cy="1737360"/>
-          </a:xfrm>
-          <a:prstGeom prst="roundRect">
-            <a:avLst>
-              <a:gd name="adj" fmla="val 6316"/>
-            </a:avLst>
-          </a:prstGeom>
-          <a:solidFill>
-            <a:srgbClr val="FFFFFF"/>
-          </a:solidFill>
-          <a:ln w="15875">
-            <a:solidFill>
-              <a:srgbClr val="08A6A6"/>
-            </a:solidFill>
-            <a:prstDash val="solid"/>
-          </a:ln>
-        </p:spPr>
-      </p:sp>
-      <p:sp>
-        <p:nvSpPr>
-          <p:cNvPr id="11" name="Text 9"/>
-          <p:cNvSpPr txBox="1"/>
-          <p:nvPr/>
-        </p:nvSpPr>
-        <p:spPr>
-          <a:xfrm>
-            <a:off x="6537960" y="2011680"/>
-            <a:ext cx="4754880" cy="365760"/>
-          </a:xfrm>
-          <a:prstGeom prst="rect">
-            <a:avLst/>
-          </a:prstGeom>
-          <a:noFill/>
-          <a:ln/>
-        </p:spPr>
-        <p:txBody>
-          <a:bodyPr wrap="square" lIns="0" tIns="0" rIns="0" bIns="0" rtlCol="0" anchor="ctr"/>
-          <a:lstStyle/>
-          <a:p>
-            <a:pPr indent="0" marL="0">
-              <a:buNone/>
-            </a:pPr>
-            <a:r>
-              <a:rPr lang="en-US" sz="1600" b="1" dirty="0">
-                <a:solidFill>
-                  <a:srgbClr val="08A6A6"/>
-                </a:solidFill>
-                <a:latin typeface="IBM Plex Sans" pitchFamily="34" charset="0"/>
-                <a:ea typeface="IBM Plex Sans" pitchFamily="34" charset="-122"/>
-                <a:cs typeface="IBM Plex Sans" pitchFamily="34" charset="-120"/>
-              </a:rPr>
-              <a:t>Inclusive means both</a:t>
+              <a:t>Predict on paper first, then look down and test it.</a:t>
             </a:r>
             <a:endParaRPr lang="en-US" sz="1600" dirty="0"/>
-          </a:p>
-        </p:txBody>
-      </p:sp>
-      <p:sp>
-        <p:nvSpPr>
-          <p:cNvPr id="12" name="Text 10"/>
-          <p:cNvSpPr txBox="1"/>
-          <p:nvPr/>
-        </p:nvSpPr>
-        <p:spPr>
-          <a:xfrm>
-            <a:off x="6537960" y="2395728"/>
-            <a:ext cx="4754880" cy="1005840"/>
-          </a:xfrm>
-          <a:prstGeom prst="rect">
-            <a:avLst/>
-          </a:prstGeom>
-          <a:noFill/>
-          <a:ln/>
-        </p:spPr>
-        <p:txBody>
-          <a:bodyPr wrap="square" lIns="0" tIns="0" rIns="0" bIns="0" rtlCol="0" anchor="t"/>
-          <a:lstStyle/>
-          <a:p>
-            <a:pPr indent="0" marL="0">
-              <a:lnSpc>
-                <a:spcPct val="120000"/>
-              </a:lnSpc>
-              <a:buNone/>
-            </a:pPr>
-            <a:r>
-              <a:rPr lang="en-US" sz="1300" dirty="0">
-                <a:solidFill>
-                  <a:srgbClr val="667085"/>
-                </a:solidFill>
-                <a:latin typeface="IBM Plex Sans" pitchFamily="34" charset="0"/>
-                <a:ea typeface="IBM Plex Sans" pitchFamily="34" charset="-122"/>
-                <a:cs typeface="IBM Plex Sans" pitchFamily="34" charset="-120"/>
-              </a:rPr>
-              <a:t>'From 1 to 10 inclusive' means 1 and 10 both pass. Test them: that is exactly what boundary data is for. Watch out that isdigit() calls a minus sign a non-digit, so a range allowing negatives needs that sign checked on its own.</a:t>
-            </a:r>
-            <a:endParaRPr lang="en-US" sz="1300" dirty="0"/>
-          </a:p>
-        </p:txBody>
-      </p:sp>
-      <p:sp>
-        <p:nvSpPr>
-          <p:cNvPr id="13" name="Shape 11"/>
-          <p:cNvSpPr/>
-          <p:nvPr/>
-        </p:nvSpPr>
-        <p:spPr>
-          <a:xfrm>
-            <a:off x="502920" y="3794760"/>
-            <a:ext cx="5394960" cy="1737360"/>
-          </a:xfrm>
-          <a:prstGeom prst="roundRect">
-            <a:avLst>
-              <a:gd name="adj" fmla="val 6316"/>
-            </a:avLst>
-          </a:prstGeom>
-          <a:solidFill>
-            <a:srgbClr val="FFFFFF"/>
-          </a:solidFill>
-          <a:ln w="15875">
-            <a:solidFill>
-              <a:srgbClr val="2D63FF"/>
-            </a:solidFill>
-            <a:prstDash val="solid"/>
-          </a:ln>
-        </p:spPr>
-      </p:sp>
-      <p:sp>
-        <p:nvSpPr>
-          <p:cNvPr id="14" name="Text 12"/>
-          <p:cNvSpPr txBox="1"/>
-          <p:nvPr/>
-        </p:nvSpPr>
-        <p:spPr>
-          <a:xfrm>
-            <a:off x="822960" y="3977640"/>
-            <a:ext cx="4754880" cy="365760"/>
-          </a:xfrm>
-          <a:prstGeom prst="rect">
-            <a:avLst/>
-          </a:prstGeom>
-          <a:noFill/>
-          <a:ln/>
-        </p:spPr>
-        <p:txBody>
-          <a:bodyPr wrap="square" lIns="0" tIns="0" rIns="0" bIns="0" rtlCol="0" anchor="ctr"/>
-          <a:lstStyle/>
-          <a:p>
-            <a:pPr indent="0" marL="0">
-              <a:buNone/>
-            </a:pPr>
-            <a:r>
-              <a:rPr lang="en-US" sz="1600" b="1" dirty="0">
-                <a:solidFill>
-                  <a:srgbClr val="2D63FF"/>
-                </a:solidFill>
-                <a:latin typeface="IBM Plex Sans" pitchFamily="34" charset="0"/>
-                <a:ea typeface="IBM Plex Sans" pitchFamily="34" charset="-122"/>
-                <a:cs typeface="IBM Plex Sans" pitchFamily="34" charset="-120"/>
-              </a:rPr>
-              <a:t>Length, then format</a:t>
-            </a:r>
-            <a:endParaRPr lang="en-US" sz="1600" dirty="0"/>
-          </a:p>
-        </p:txBody>
-      </p:sp>
-      <p:sp>
-        <p:nvSpPr>
-          <p:cNvPr id="15" name="Text 13"/>
-          <p:cNvSpPr txBox="1"/>
-          <p:nvPr/>
-        </p:nvSpPr>
-        <p:spPr>
-          <a:xfrm>
-            <a:off x="822960" y="4361688"/>
-            <a:ext cx="4754880" cy="1005840"/>
-          </a:xfrm>
-          <a:prstGeom prst="rect">
-            <a:avLst/>
-          </a:prstGeom>
-          <a:noFill/>
-          <a:ln/>
-        </p:spPr>
-        <p:txBody>
-          <a:bodyPr wrap="square" lIns="0" tIns="0" rIns="0" bIns="0" rtlCol="0" anchor="t"/>
-          <a:lstStyle/>
-          <a:p>
-            <a:pPr indent="0" marL="0">
-              <a:lnSpc>
-                <a:spcPct val="120000"/>
-              </a:lnSpc>
-              <a:buNone/>
-            </a:pPr>
-            <a:r>
-              <a:rPr lang="en-US" sz="1300" dirty="0">
-                <a:solidFill>
-                  <a:srgbClr val="667085"/>
-                </a:solidFill>
-                <a:latin typeface="IBM Plex Sans" pitchFamily="34" charset="0"/>
-                <a:ea typeface="IBM Plex Sans" pitchFamily="34" charset="-122"/>
-                <a:cs typeface="IBM Plex Sans" pitchFamily="34" charset="-120"/>
-              </a:rPr>
-              <a:t>Checking the length first means a format check can safely look at a particular position in the string.</a:t>
-            </a:r>
-            <a:endParaRPr lang="en-US" sz="1300" dirty="0"/>
-          </a:p>
-        </p:txBody>
-      </p:sp>
-      <p:sp>
-        <p:nvSpPr>
-          <p:cNvPr id="16" name="Shape 14"/>
-          <p:cNvSpPr/>
-          <p:nvPr/>
-        </p:nvSpPr>
-        <p:spPr>
-          <a:xfrm>
-            <a:off x="6217920" y="3794760"/>
-            <a:ext cx="5394960" cy="1737360"/>
-          </a:xfrm>
-          <a:prstGeom prst="roundRect">
-            <a:avLst>
-              <a:gd name="adj" fmla="val 6316"/>
-            </a:avLst>
-          </a:prstGeom>
-          <a:solidFill>
-            <a:srgbClr val="FFFFFF"/>
-          </a:solidFill>
-          <a:ln w="15875">
-            <a:solidFill>
-              <a:srgbClr val="08A6A6"/>
-            </a:solidFill>
-            <a:prstDash val="solid"/>
-          </a:ln>
-        </p:spPr>
-      </p:sp>
-      <p:sp>
-        <p:nvSpPr>
-          <p:cNvPr id="17" name="Text 15"/>
-          <p:cNvSpPr txBox="1"/>
-          <p:nvPr/>
-        </p:nvSpPr>
-        <p:spPr>
-          <a:xfrm>
-            <a:off x="6537960" y="3977640"/>
-            <a:ext cx="4754880" cy="365760"/>
-          </a:xfrm>
-          <a:prstGeom prst="rect">
-            <a:avLst/>
-          </a:prstGeom>
-          <a:noFill/>
-          <a:ln/>
-        </p:spPr>
-        <p:txBody>
-          <a:bodyPr wrap="square" lIns="0" tIns="0" rIns="0" bIns="0" rtlCol="0" anchor="ctr"/>
-          <a:lstStyle/>
-          <a:p>
-            <a:pPr indent="0" marL="0">
-              <a:buNone/>
-            </a:pPr>
-            <a:r>
-              <a:rPr lang="en-US" sz="1600" b="1" dirty="0">
-                <a:solidFill>
-                  <a:srgbClr val="08A6A6"/>
-                </a:solidFill>
-                <a:latin typeface="IBM Plex Sans" pitchFamily="34" charset="0"/>
-                <a:ea typeface="IBM Plex Sans" pitchFamily="34" charset="-122"/>
-                <a:cs typeface="IBM Plex Sans" pitchFamily="34" charset="-120"/>
-              </a:rPr>
-              <a:t>Say what was wrong</a:t>
-            </a:r>
-            <a:endParaRPr lang="en-US" sz="1600" dirty="0"/>
-          </a:p>
-        </p:txBody>
-      </p:sp>
-      <p:sp>
-        <p:nvSpPr>
-          <p:cNvPr id="18" name="Text 16"/>
-          <p:cNvSpPr txBox="1"/>
-          <p:nvPr/>
-        </p:nvSpPr>
-        <p:spPr>
-          <a:xfrm>
-            <a:off x="6537960" y="4361688"/>
-            <a:ext cx="4754880" cy="1005840"/>
-          </a:xfrm>
-          <a:prstGeom prst="rect">
-            <a:avLst/>
-          </a:prstGeom>
-          <a:noFill/>
-          <a:ln/>
-        </p:spPr>
-        <p:txBody>
-          <a:bodyPr wrap="square" lIns="0" tIns="0" rIns="0" bIns="0" rtlCol="0" anchor="t"/>
-          <a:lstStyle/>
-          <a:p>
-            <a:pPr indent="0" marL="0">
-              <a:lnSpc>
-                <a:spcPct val="120000"/>
-              </a:lnSpc>
-              <a:buNone/>
-            </a:pPr>
-            <a:r>
-              <a:rPr lang="en-US" sz="1300" dirty="0">
-                <a:solidFill>
-                  <a:srgbClr val="667085"/>
-                </a:solidFill>
-                <a:latin typeface="IBM Plex Sans" pitchFamily="34" charset="0"/>
-                <a:ea typeface="IBM Plex Sans" pitchFamily="34" charset="-122"/>
-                <a:cs typeface="IBM Plex Sans" pitchFamily="34" charset="-120"/>
-              </a:rPr>
-              <a:t>A loop that only answers 'invalid' leaves the user guessing. Testing the rules one at a time lets the program name the rule that was broken, which is why these checks are usually written as if ... elif ...</a:t>
-            </a:r>
-            <a:endParaRPr lang="en-US" sz="1300" dirty="0"/>
           </a:p>
         </p:txBody>
       </p:sp>
@@ -3952,7 +4279,7 @@
                 <a:ea typeface="IBM Plex Sans" pitchFamily="34" charset="-122"/>
                 <a:cs typeface="IBM Plex Sans" pitchFamily="34" charset="-120"/>
               </a:rPr>
-              <a:t>Exam practice</a:t>
+              <a:t>Worth knowing</a:t>
             </a:r>
             <a:endParaRPr lang="en-US" sz="3200" dirty="0"/>
           </a:p>
@@ -3991,7 +4318,7 @@
                 <a:ea typeface="IBM Plex Sans" pitchFamily="34" charset="-122"/>
                 <a:cs typeface="IBM Plex Sans" pitchFamily="34" charset="-120"/>
               </a:rPr>
-              <a:t>Devices away. Answer from memory on the worksheet.</a:t>
+              <a:t>The information markers dotted around the room</a:t>
             </a:r>
             <a:endParaRPr lang="en-US" sz="1500" dirty="0"/>
           </a:p>
@@ -4006,11 +4333,11 @@
         <p:spPr>
           <a:xfrm>
             <a:off x="502920" y="1828800"/>
-            <a:ext cx="11155680" cy="1097280"/>
+            <a:ext cx="5394960" cy="1737360"/>
           </a:xfrm>
           <a:prstGeom prst="roundRect">
             <a:avLst>
-              <a:gd name="adj" fmla="val 10000"/>
+              <a:gd name="adj" fmla="val 6316"/>
             </a:avLst>
           </a:prstGeom>
           <a:solidFill>
@@ -4018,7 +4345,7 @@
           </a:solidFill>
           <a:ln w="15875">
             <a:solidFill>
-              <a:srgbClr val="D9DEE7"/>
+              <a:srgbClr val="2D63FF"/>
             </a:solidFill>
             <a:prstDash val="solid"/>
           </a:ln>
@@ -4032,387 +4359,93 @@
         </p:nvSpPr>
         <p:spPr>
           <a:xfrm>
-            <a:off x="914400" y="1938528"/>
-            <a:ext cx="9418320" cy="877824"/>
-          </a:xfrm>
-          <a:prstGeom prst="rect">
-            <a:avLst/>
-          </a:prstGeom>
-          <a:noFill/>
-          <a:ln/>
-        </p:spPr>
-        <p:txBody>
-          <a:bodyPr wrap="square" lIns="0" tIns="0" rIns="0" bIns="0" rtlCol="0" anchor="ctr"/>
-          <a:lstStyle/>
-          <a:p>
-            <a:pPr indent="0" marL="0">
-              <a:lnSpc>
-                <a:spcPct val="118000"/>
-              </a:lnSpc>
-              <a:buNone/>
-            </a:pPr>
-            <a:r>
-              <a:rPr lang="en-US" sz="1700" dirty="0">
-                <a:solidFill>
-                  <a:srgbClr val="101828"/>
+            <a:off x="822960" y="2011680"/>
+            <a:ext cx="4754880" cy="365760"/>
+          </a:xfrm>
+          <a:prstGeom prst="rect">
+            <a:avLst/>
+          </a:prstGeom>
+          <a:noFill/>
+          <a:ln/>
+        </p:spPr>
+        <p:txBody>
+          <a:bodyPr wrap="square" lIns="0" tIns="0" rIns="0" bIns="0" rtlCol="0" anchor="ctr"/>
+          <a:lstStyle/>
+          <a:p>
+            <a:pPr indent="0" marL="0">
+              <a:buNone/>
+            </a:pPr>
+            <a:r>
+              <a:rPr lang="en-US" sz="1600" b="1" dirty="0">
+                <a:solidFill>
+                  <a:srgbClr val="2D63FF"/>
                 </a:solidFill>
                 <a:latin typeface="IBM Plex Sans" pitchFamily="34" charset="0"/>
                 <a:ea typeface="IBM Plex Sans" pitchFamily="34" charset="-122"/>
                 <a:cs typeface="IBM Plex Sans" pitchFamily="34" charset="-120"/>
               </a:rPr>
-              <a:t>A range check for a score that must be from 1 to 10 inclusive is written </a:t>
-            </a:r>
+              <a:t>A list of allowed values</a:t>
+            </a:r>
+            <a:endParaRPr lang="en-US" sz="1600" dirty="0"/>
+          </a:p>
+        </p:txBody>
+      </p:sp>
+      <p:sp>
+        <p:nvSpPr>
+          <p:cNvPr id="9" name="Text 7"/>
+          <p:cNvSpPr txBox="1"/>
+          <p:nvPr/>
+        </p:nvSpPr>
+        <p:spPr>
+          <a:xfrm>
+            <a:off x="822960" y="2395728"/>
+            <a:ext cx="4754880" cy="1005840"/>
+          </a:xfrm>
+          <a:prstGeom prst="rect">
+            <a:avLst/>
+          </a:prstGeom>
+          <a:noFill/>
+          <a:ln/>
+        </p:spPr>
+        <p:txBody>
+          <a:bodyPr wrap="square" lIns="0" tIns="0" rIns="0" bIns="0" rtlCol="0" anchor="t"/>
+          <a:lstStyle/>
+          <a:p>
             <a:pPr indent="0" marL="0">
               <a:lnSpc>
-                <a:spcPct val="118000"/>
+                <a:spcPct val="120000"/>
               </a:lnSpc>
               <a:buNone/>
             </a:pPr>
             <a:r>
-              <a:rPr lang="en-US" sz="1700" dirty="0">
-                <a:solidFill>
-                  <a:srgbClr val="6B21A8"/>
-                </a:solidFill>
-                <a:latin typeface="IBM Plex Mono" pitchFamily="34" charset="0"/>
-                <a:ea typeface="IBM Plex Mono" pitchFamily="34" charset="-122"/>
-                <a:cs typeface="IBM Plex Mono" pitchFamily="34" charset="-120"/>
-              </a:rPr>
-              <a:t>if</a:t>
-            </a:r>
-            <a:pPr indent="0" marL="0">
-              <a:lnSpc>
-                <a:spcPct val="118000"/>
-              </a:lnSpc>
-              <a:buNone/>
-            </a:pPr>
-            <a:r>
-              <a:rPr lang="en-US" sz="1700" dirty="0">
-                <a:solidFill>
-                  <a:srgbClr val="18181B"/>
-                </a:solidFill>
-                <a:latin typeface="IBM Plex Mono" pitchFamily="34" charset="0"/>
-                <a:ea typeface="IBM Plex Mono" pitchFamily="34" charset="-122"/>
-                <a:cs typeface="IBM Plex Mono" pitchFamily="34" charset="-120"/>
-              </a:rPr>
-              <a:t> </a:t>
-            </a:r>
-            <a:pPr indent="0" marL="0">
-              <a:lnSpc>
-                <a:spcPct val="118000"/>
-              </a:lnSpc>
-              <a:buNone/>
-            </a:pPr>
-            <a:r>
-              <a:rPr lang="en-US" sz="1700" dirty="0">
-                <a:solidFill>
-                  <a:srgbClr val="18181B"/>
-                </a:solidFill>
-                <a:latin typeface="IBM Plex Mono" pitchFamily="34" charset="0"/>
-                <a:ea typeface="IBM Plex Mono" pitchFamily="34" charset="-122"/>
-                <a:cs typeface="IBM Plex Mono" pitchFamily="34" charset="-120"/>
-              </a:rPr>
-              <a:t>score</a:t>
-            </a:r>
-            <a:pPr indent="0" marL="0">
-              <a:lnSpc>
-                <a:spcPct val="118000"/>
-              </a:lnSpc>
-              <a:buNone/>
-            </a:pPr>
-            <a:r>
-              <a:rPr lang="en-US" sz="1700" dirty="0">
-                <a:solidFill>
-                  <a:srgbClr val="18181B"/>
-                </a:solidFill>
-                <a:latin typeface="IBM Plex Mono" pitchFamily="34" charset="0"/>
-                <a:ea typeface="IBM Plex Mono" pitchFamily="34" charset="-122"/>
-                <a:cs typeface="IBM Plex Mono" pitchFamily="34" charset="-120"/>
-              </a:rPr>
-              <a:t> </a:t>
-            </a:r>
-            <a:pPr indent="0" marL="0">
-              <a:lnSpc>
-                <a:spcPct val="118000"/>
-              </a:lnSpc>
-              <a:buNone/>
-            </a:pPr>
-            <a:r>
-              <a:rPr lang="en-US" sz="1700" dirty="0">
-                <a:solidFill>
-                  <a:srgbClr val="3F3F46"/>
-                </a:solidFill>
-                <a:latin typeface="IBM Plex Mono" pitchFamily="34" charset="0"/>
-                <a:ea typeface="IBM Plex Mono" pitchFamily="34" charset="-122"/>
-                <a:cs typeface="IBM Plex Mono" pitchFamily="34" charset="-120"/>
-              </a:rPr>
-              <a:t>&gt;</a:t>
-            </a:r>
-            <a:pPr indent="0" marL="0">
-              <a:lnSpc>
-                <a:spcPct val="118000"/>
-              </a:lnSpc>
-              <a:buNone/>
-            </a:pPr>
-            <a:r>
-              <a:rPr lang="en-US" sz="1700" dirty="0">
-                <a:solidFill>
-                  <a:srgbClr val="18181B"/>
-                </a:solidFill>
-                <a:latin typeface="IBM Plex Mono" pitchFamily="34" charset="0"/>
-                <a:ea typeface="IBM Plex Mono" pitchFamily="34" charset="-122"/>
-                <a:cs typeface="IBM Plex Mono" pitchFamily="34" charset="-120"/>
-              </a:rPr>
-              <a:t> </a:t>
-            </a:r>
-            <a:pPr indent="0" marL="0">
-              <a:lnSpc>
-                <a:spcPct val="118000"/>
-              </a:lnSpc>
-              <a:buNone/>
-            </a:pPr>
-            <a:r>
-              <a:rPr lang="en-US" sz="1700" dirty="0">
-                <a:solidFill>
-                  <a:srgbClr val="9A3412"/>
-                </a:solidFill>
-                <a:latin typeface="IBM Plex Mono" pitchFamily="34" charset="0"/>
-                <a:ea typeface="IBM Plex Mono" pitchFamily="34" charset="-122"/>
-                <a:cs typeface="IBM Plex Mono" pitchFamily="34" charset="-120"/>
-              </a:rPr>
-              <a:t>1</a:t>
-            </a:r>
-            <a:pPr indent="0" marL="0">
-              <a:lnSpc>
-                <a:spcPct val="118000"/>
-              </a:lnSpc>
-              <a:buNone/>
-            </a:pPr>
-            <a:r>
-              <a:rPr lang="en-US" sz="1700" dirty="0">
-                <a:solidFill>
-                  <a:srgbClr val="18181B"/>
-                </a:solidFill>
-                <a:latin typeface="IBM Plex Mono" pitchFamily="34" charset="0"/>
-                <a:ea typeface="IBM Plex Mono" pitchFamily="34" charset="-122"/>
-                <a:cs typeface="IBM Plex Mono" pitchFamily="34" charset="-120"/>
-              </a:rPr>
-              <a:t> </a:t>
-            </a:r>
-            <a:pPr indent="0" marL="0">
-              <a:lnSpc>
-                <a:spcPct val="118000"/>
-              </a:lnSpc>
-              <a:buNone/>
-            </a:pPr>
-            <a:r>
-              <a:rPr lang="en-US" sz="1700" dirty="0">
-                <a:solidFill>
-                  <a:srgbClr val="6B21A8"/>
-                </a:solidFill>
-                <a:latin typeface="IBM Plex Mono" pitchFamily="34" charset="0"/>
-                <a:ea typeface="IBM Plex Mono" pitchFamily="34" charset="-122"/>
-                <a:cs typeface="IBM Plex Mono" pitchFamily="34" charset="-120"/>
-              </a:rPr>
-              <a:t>and</a:t>
-            </a:r>
-            <a:pPr indent="0" marL="0">
-              <a:lnSpc>
-                <a:spcPct val="118000"/>
-              </a:lnSpc>
-              <a:buNone/>
-            </a:pPr>
-            <a:r>
-              <a:rPr lang="en-US" sz="1700" dirty="0">
-                <a:solidFill>
-                  <a:srgbClr val="18181B"/>
-                </a:solidFill>
-                <a:latin typeface="IBM Plex Mono" pitchFamily="34" charset="0"/>
-                <a:ea typeface="IBM Plex Mono" pitchFamily="34" charset="-122"/>
-                <a:cs typeface="IBM Plex Mono" pitchFamily="34" charset="-120"/>
-              </a:rPr>
-              <a:t> </a:t>
-            </a:r>
-            <a:pPr indent="0" marL="0">
-              <a:lnSpc>
-                <a:spcPct val="118000"/>
-              </a:lnSpc>
-              <a:buNone/>
-            </a:pPr>
-            <a:r>
-              <a:rPr lang="en-US" sz="1700" dirty="0">
-                <a:solidFill>
-                  <a:srgbClr val="18181B"/>
-                </a:solidFill>
-                <a:latin typeface="IBM Plex Mono" pitchFamily="34" charset="0"/>
-                <a:ea typeface="IBM Plex Mono" pitchFamily="34" charset="-122"/>
-                <a:cs typeface="IBM Plex Mono" pitchFamily="34" charset="-120"/>
-              </a:rPr>
-              <a:t>score</a:t>
-            </a:r>
-            <a:pPr indent="0" marL="0">
-              <a:lnSpc>
-                <a:spcPct val="118000"/>
-              </a:lnSpc>
-              <a:buNone/>
-            </a:pPr>
-            <a:r>
-              <a:rPr lang="en-US" sz="1700" dirty="0">
-                <a:solidFill>
-                  <a:srgbClr val="18181B"/>
-                </a:solidFill>
-                <a:latin typeface="IBM Plex Mono" pitchFamily="34" charset="0"/>
-                <a:ea typeface="IBM Plex Mono" pitchFamily="34" charset="-122"/>
-                <a:cs typeface="IBM Plex Mono" pitchFamily="34" charset="-120"/>
-              </a:rPr>
-              <a:t> </a:t>
-            </a:r>
-            <a:pPr indent="0" marL="0">
-              <a:lnSpc>
-                <a:spcPct val="118000"/>
-              </a:lnSpc>
-              <a:buNone/>
-            </a:pPr>
-            <a:r>
-              <a:rPr lang="en-US" sz="1700" dirty="0">
-                <a:solidFill>
-                  <a:srgbClr val="3F3F46"/>
-                </a:solidFill>
-                <a:latin typeface="IBM Plex Mono" pitchFamily="34" charset="0"/>
-                <a:ea typeface="IBM Plex Mono" pitchFamily="34" charset="-122"/>
-                <a:cs typeface="IBM Plex Mono" pitchFamily="34" charset="-120"/>
-              </a:rPr>
-              <a:t>&lt;</a:t>
-            </a:r>
-            <a:pPr indent="0" marL="0">
-              <a:lnSpc>
-                <a:spcPct val="118000"/>
-              </a:lnSpc>
-              <a:buNone/>
-            </a:pPr>
-            <a:r>
-              <a:rPr lang="en-US" sz="1700" dirty="0">
-                <a:solidFill>
-                  <a:srgbClr val="18181B"/>
-                </a:solidFill>
-                <a:latin typeface="IBM Plex Mono" pitchFamily="34" charset="0"/>
-                <a:ea typeface="IBM Plex Mono" pitchFamily="34" charset="-122"/>
-                <a:cs typeface="IBM Plex Mono" pitchFamily="34" charset="-120"/>
-              </a:rPr>
-              <a:t> </a:t>
-            </a:r>
-            <a:pPr indent="0" marL="0">
-              <a:lnSpc>
-                <a:spcPct val="118000"/>
-              </a:lnSpc>
-              <a:buNone/>
-            </a:pPr>
-            <a:r>
-              <a:rPr lang="en-US" sz="1700" dirty="0">
-                <a:solidFill>
-                  <a:srgbClr val="9A3412"/>
-                </a:solidFill>
-                <a:latin typeface="IBM Plex Mono" pitchFamily="34" charset="0"/>
-                <a:ea typeface="IBM Plex Mono" pitchFamily="34" charset="-122"/>
-                <a:cs typeface="IBM Plex Mono" pitchFamily="34" charset="-120"/>
-              </a:rPr>
-              <a:t>10</a:t>
-            </a:r>
-            <a:pPr indent="0" marL="0">
-              <a:lnSpc>
-                <a:spcPct val="118000"/>
-              </a:lnSpc>
-              <a:buNone/>
-            </a:pPr>
-            <a:r>
-              <a:rPr lang="en-US" sz="1700" dirty="0">
-                <a:solidFill>
-                  <a:srgbClr val="101828"/>
+              <a:rPr lang="en-US" sz="1300" dirty="0">
+                <a:solidFill>
+                  <a:srgbClr val="667085"/>
                 </a:solidFill>
                 <a:latin typeface="IBM Plex Sans" pitchFamily="34" charset="0"/>
                 <a:ea typeface="IBM Plex Sans" pitchFamily="34" charset="-122"/>
                 <a:cs typeface="IBM Plex Sans" pitchFamily="34" charset="-120"/>
               </a:rPr>
-              <a:t>. State the two scores this wrongly refuses, and write the condition corrected.</a:t>
-            </a:r>
-            <a:endParaRPr lang="en-US" sz="1700" dirty="0"/>
-          </a:p>
-        </p:txBody>
-      </p:sp>
-      <p:sp>
-        <p:nvSpPr>
-          <p:cNvPr id="9" name="Shape 7"/>
+              <a:t>Some values are only valid if they appear on a list the program already holds, which is a lookup check. Comparing exactly means one capital letter makes a value unknown, so decide whether to lower() both sides first.</a:t>
+            </a:r>
+            <a:endParaRPr lang="en-US" sz="1300" dirty="0"/>
+          </a:p>
+        </p:txBody>
+      </p:sp>
+      <p:sp>
+        <p:nvSpPr>
+          <p:cNvPr id="10" name="Shape 8"/>
           <p:cNvSpPr/>
           <p:nvPr/>
         </p:nvSpPr>
         <p:spPr>
           <a:xfrm>
-            <a:off x="10515600" y="2130552"/>
-            <a:ext cx="868680" cy="493776"/>
+            <a:off x="6217920" y="1828800"/>
+            <a:ext cx="5394960" cy="1737360"/>
           </a:xfrm>
           <a:prstGeom prst="roundRect">
             <a:avLst>
-              <a:gd name="adj" fmla="val 18519"/>
-            </a:avLst>
-          </a:prstGeom>
-          <a:solidFill>
-            <a:srgbClr val="EEF2FB"/>
-          </a:solidFill>
-          <a:ln/>
-        </p:spPr>
-      </p:sp>
-      <p:sp>
-        <p:nvSpPr>
-          <p:cNvPr id="10" name="Text 8"/>
-          <p:cNvSpPr txBox="1"/>
-          <p:nvPr/>
-        </p:nvSpPr>
-        <p:spPr>
-          <a:xfrm>
-            <a:off x="10515600" y="2130552"/>
-            <a:ext cx="868680" cy="493776"/>
-          </a:xfrm>
-          <a:prstGeom prst="rect">
-            <a:avLst/>
-          </a:prstGeom>
-          <a:noFill/>
-          <a:ln/>
-        </p:spPr>
-        <p:txBody>
-          <a:bodyPr wrap="square" lIns="0" tIns="0" rIns="0" bIns="0" rtlCol="0" anchor="ctr"/>
-          <a:lstStyle/>
-          <a:p>
-            <a:pPr algn="ctr" indent="0" marL="0">
-              <a:buNone/>
-            </a:pPr>
-            <a:r>
-              <a:rPr lang="en-US" sz="1500" b="1" dirty="0">
-                <a:solidFill>
-                  <a:srgbClr val="2D63FF"/>
-                </a:solidFill>
-                <a:latin typeface="IBM Plex Mono" pitchFamily="34" charset="0"/>
-                <a:ea typeface="IBM Plex Mono" pitchFamily="34" charset="-122"/>
-                <a:cs typeface="IBM Plex Mono" pitchFamily="34" charset="-120"/>
-              </a:rPr>
-              <a:t>[3]</a:t>
-            </a:r>
-            <a:endParaRPr lang="en-US" sz="1500" dirty="0"/>
-          </a:p>
-        </p:txBody>
-      </p:sp>
-      <p:sp>
-        <p:nvSpPr>
-          <p:cNvPr id="11" name="Shape 9"/>
-          <p:cNvSpPr/>
-          <p:nvPr/>
-        </p:nvSpPr>
-        <p:spPr>
-          <a:xfrm>
-            <a:off x="502920" y="3127248"/>
-            <a:ext cx="11155680" cy="1097280"/>
-          </a:xfrm>
-          <a:prstGeom prst="roundRect">
-            <a:avLst>
-              <a:gd name="adj" fmla="val 10000"/>
+              <a:gd name="adj" fmla="val 6316"/>
             </a:avLst>
           </a:prstGeom>
           <a:solidFill>
@@ -4420,7 +4453,7 @@
           </a:solidFill>
           <a:ln w="15875">
             <a:solidFill>
-              <a:srgbClr val="D9DEE7"/>
+              <a:srgbClr val="08A6A6"/>
             </a:solidFill>
             <a:prstDash val="solid"/>
           </a:ln>
@@ -4428,43 +4461,82 @@
       </p:sp>
       <p:sp>
         <p:nvSpPr>
-          <p:cNvPr id="12" name="Text 10"/>
-          <p:cNvSpPr txBox="1"/>
-          <p:nvPr/>
-        </p:nvSpPr>
-        <p:spPr>
-          <a:xfrm>
-            <a:off x="914400" y="3236976"/>
-            <a:ext cx="9418320" cy="877824"/>
-          </a:xfrm>
-          <a:prstGeom prst="rect">
-            <a:avLst/>
-          </a:prstGeom>
-          <a:noFill/>
-          <a:ln/>
-        </p:spPr>
-        <p:txBody>
-          <a:bodyPr wrap="square" lIns="0" tIns="0" rIns="0" bIns="0" rtlCol="0" anchor="ctr"/>
-          <a:lstStyle/>
-          <a:p>
-            <a:pPr indent="0" marL="0">
-              <a:lnSpc>
-                <a:spcPct val="118000"/>
-              </a:lnSpc>
-              <a:buNone/>
-            </a:pPr>
-            <a:r>
-              <a:rPr lang="en-US" sz="1700" dirty="0">
-                <a:solidFill>
-                  <a:srgbClr val="101828"/>
+          <p:cNvPr id="11" name="Text 9"/>
+          <p:cNvSpPr txBox="1"/>
+          <p:nvPr/>
+        </p:nvSpPr>
+        <p:spPr>
+          <a:xfrm>
+            <a:off x="6537960" y="2011680"/>
+            <a:ext cx="4754880" cy="365760"/>
+          </a:xfrm>
+          <a:prstGeom prst="rect">
+            <a:avLst/>
+          </a:prstGeom>
+          <a:noFill/>
+          <a:ln/>
+        </p:spPr>
+        <p:txBody>
+          <a:bodyPr wrap="square" lIns="0" tIns="0" rIns="0" bIns="0" rtlCol="0" anchor="ctr"/>
+          <a:lstStyle/>
+          <a:p>
+            <a:pPr indent="0" marL="0">
+              <a:buNone/>
+            </a:pPr>
+            <a:r>
+              <a:rPr lang="en-US" sz="1600" b="1" dirty="0">
+                <a:solidFill>
+                  <a:srgbClr val="08A6A6"/>
                 </a:solidFill>
                 <a:latin typeface="IBM Plex Sans" pitchFamily="34" charset="0"/>
                 <a:ea typeface="IBM Plex Sans" pitchFamily="34" charset="-122"/>
                 <a:cs typeface="IBM Plex Sans" pitchFamily="34" charset="-120"/>
               </a:rPr>
-              <a:t>Write a program that keeps asking for a code of exactly one letter followed by two digits, saying what is wrong each time, until a valid code is typed.</a:t>
-            </a:r>
-            <a:endParaRPr lang="en-US" sz="1700" dirty="0"/>
+              <a:t>Inclusive means both</a:t>
+            </a:r>
+            <a:endParaRPr lang="en-US" sz="1600" dirty="0"/>
+          </a:p>
+        </p:txBody>
+      </p:sp>
+      <p:sp>
+        <p:nvSpPr>
+          <p:cNvPr id="12" name="Text 10"/>
+          <p:cNvSpPr txBox="1"/>
+          <p:nvPr/>
+        </p:nvSpPr>
+        <p:spPr>
+          <a:xfrm>
+            <a:off x="6537960" y="2395728"/>
+            <a:ext cx="4754880" cy="1005840"/>
+          </a:xfrm>
+          <a:prstGeom prst="rect">
+            <a:avLst/>
+          </a:prstGeom>
+          <a:noFill/>
+          <a:ln/>
+        </p:spPr>
+        <p:txBody>
+          <a:bodyPr wrap="square" lIns="0" tIns="0" rIns="0" bIns="0" rtlCol="0" anchor="t"/>
+          <a:lstStyle/>
+          <a:p>
+            <a:pPr indent="0" marL="0">
+              <a:lnSpc>
+                <a:spcPct val="120000"/>
+              </a:lnSpc>
+              <a:buNone/>
+            </a:pPr>
+            <a:r>
+              <a:rPr lang="en-US" sz="1300" dirty="0">
+                <a:solidFill>
+                  <a:srgbClr val="667085"/>
+                </a:solidFill>
+                <a:latin typeface="IBM Plex Sans" pitchFamily="34" charset="0"/>
+                <a:ea typeface="IBM Plex Sans" pitchFamily="34" charset="-122"/>
+                <a:cs typeface="IBM Plex Sans" pitchFamily="34" charset="-120"/>
+              </a:rPr>
+              <a:t>'From 1 to 10 inclusive' means 1 and 10 both pass. Test them: that is exactly what boundary data is for. Watch out that isdigit() calls a minus sign a non-digit, so a range allowing negatives needs that sign checked on its own.</a:t>
+            </a:r>
+            <a:endParaRPr lang="en-US" sz="1300" dirty="0"/>
           </a:p>
         </p:txBody>
       </p:sp>
@@ -4476,73 +4548,12 @@
         </p:nvSpPr>
         <p:spPr>
           <a:xfrm>
-            <a:off x="10515600" y="3429000"/>
-            <a:ext cx="868680" cy="493776"/>
+            <a:off x="502920" y="3794760"/>
+            <a:ext cx="5394960" cy="1737360"/>
           </a:xfrm>
           <a:prstGeom prst="roundRect">
             <a:avLst>
-              <a:gd name="adj" fmla="val 18519"/>
-            </a:avLst>
-          </a:prstGeom>
-          <a:solidFill>
-            <a:srgbClr val="EEF2FB"/>
-          </a:solidFill>
-          <a:ln/>
-        </p:spPr>
-      </p:sp>
-      <p:sp>
-        <p:nvSpPr>
-          <p:cNvPr id="14" name="Text 12"/>
-          <p:cNvSpPr txBox="1"/>
-          <p:nvPr/>
-        </p:nvSpPr>
-        <p:spPr>
-          <a:xfrm>
-            <a:off x="10515600" y="3429000"/>
-            <a:ext cx="868680" cy="493776"/>
-          </a:xfrm>
-          <a:prstGeom prst="rect">
-            <a:avLst/>
-          </a:prstGeom>
-          <a:noFill/>
-          <a:ln/>
-        </p:spPr>
-        <p:txBody>
-          <a:bodyPr wrap="square" lIns="0" tIns="0" rIns="0" bIns="0" rtlCol="0" anchor="ctr"/>
-          <a:lstStyle/>
-          <a:p>
-            <a:pPr algn="ctr" indent="0" marL="0">
-              <a:buNone/>
-            </a:pPr>
-            <a:r>
-              <a:rPr lang="en-US" sz="1500" b="1" dirty="0">
-                <a:solidFill>
-                  <a:srgbClr val="2D63FF"/>
-                </a:solidFill>
-                <a:latin typeface="IBM Plex Mono" pitchFamily="34" charset="0"/>
-                <a:ea typeface="IBM Plex Mono" pitchFamily="34" charset="-122"/>
-                <a:cs typeface="IBM Plex Mono" pitchFamily="34" charset="-120"/>
-              </a:rPr>
-              <a:t>[6]</a:t>
-            </a:r>
-            <a:endParaRPr lang="en-US" sz="1500" dirty="0"/>
-          </a:p>
-        </p:txBody>
-      </p:sp>
-      <p:sp>
-        <p:nvSpPr>
-          <p:cNvPr id="15" name="Shape 13"/>
-          <p:cNvSpPr/>
-          <p:nvPr/>
-        </p:nvSpPr>
-        <p:spPr>
-          <a:xfrm>
-            <a:off x="502920" y="4425696"/>
-            <a:ext cx="11155680" cy="1097280"/>
-          </a:xfrm>
-          <a:prstGeom prst="roundRect">
-            <a:avLst>
-              <a:gd name="adj" fmla="val 10000"/>
+              <a:gd name="adj" fmla="val 6316"/>
             </a:avLst>
           </a:prstGeom>
           <a:solidFill>
@@ -4550,7 +4561,7 @@
           </a:solidFill>
           <a:ln w="15875">
             <a:solidFill>
-              <a:srgbClr val="D9DEE7"/>
+              <a:srgbClr val="2D63FF"/>
             </a:solidFill>
             <a:prstDash val="solid"/>
           </a:ln>
@@ -4558,67 +4569,150 @@
       </p:sp>
       <p:sp>
         <p:nvSpPr>
-          <p:cNvPr id="16" name="Text 14"/>
-          <p:cNvSpPr txBox="1"/>
-          <p:nvPr/>
-        </p:nvSpPr>
-        <p:spPr>
-          <a:xfrm>
-            <a:off x="914400" y="4535424"/>
-            <a:ext cx="9418320" cy="877824"/>
-          </a:xfrm>
-          <a:prstGeom prst="rect">
-            <a:avLst/>
-          </a:prstGeom>
-          <a:noFill/>
-          <a:ln/>
-        </p:spPr>
-        <p:txBody>
-          <a:bodyPr wrap="square" lIns="0" tIns="0" rIns="0" bIns="0" rtlCol="0" anchor="ctr"/>
-          <a:lstStyle/>
-          <a:p>
-            <a:pPr indent="0" marL="0">
-              <a:lnSpc>
-                <a:spcPct val="118000"/>
-              </a:lnSpc>
-              <a:buNone/>
-            </a:pPr>
-            <a:r>
-              <a:rPr lang="en-US" sz="1700" dirty="0">
-                <a:solidFill>
-                  <a:srgbClr val="101828"/>
+          <p:cNvPr id="14" name="Text 12"/>
+          <p:cNvSpPr txBox="1"/>
+          <p:nvPr/>
+        </p:nvSpPr>
+        <p:spPr>
+          <a:xfrm>
+            <a:off x="822960" y="3977640"/>
+            <a:ext cx="4754880" cy="365760"/>
+          </a:xfrm>
+          <a:prstGeom prst="rect">
+            <a:avLst/>
+          </a:prstGeom>
+          <a:noFill/>
+          <a:ln/>
+        </p:spPr>
+        <p:txBody>
+          <a:bodyPr wrap="square" lIns="0" tIns="0" rIns="0" bIns="0" rtlCol="0" anchor="ctr"/>
+          <a:lstStyle/>
+          <a:p>
+            <a:pPr indent="0" marL="0">
+              <a:buNone/>
+            </a:pPr>
+            <a:r>
+              <a:rPr lang="en-US" sz="1600" b="1" dirty="0">
+                <a:solidFill>
+                  <a:srgbClr val="2D63FF"/>
                 </a:solidFill>
                 <a:latin typeface="IBM Plex Sans" pitchFamily="34" charset="0"/>
                 <a:ea typeface="IBM Plex Sans" pitchFamily="34" charset="-122"/>
                 <a:cs typeface="IBM Plex Sans" pitchFamily="34" charset="-120"/>
               </a:rPr>
-              <a:t>Write a program that allows three attempts at a four-digit passcode already held in the program, and prints Locked when all three attempts are wrong.</a:t>
-            </a:r>
-            <a:endParaRPr lang="en-US" sz="1700" dirty="0"/>
-          </a:p>
-        </p:txBody>
-      </p:sp>
-      <p:sp>
-        <p:nvSpPr>
-          <p:cNvPr id="17" name="Shape 15"/>
+              <a:t>Length, then format</a:t>
+            </a:r>
+            <a:endParaRPr lang="en-US" sz="1600" dirty="0"/>
+          </a:p>
+        </p:txBody>
+      </p:sp>
+      <p:sp>
+        <p:nvSpPr>
+          <p:cNvPr id="15" name="Text 13"/>
+          <p:cNvSpPr txBox="1"/>
+          <p:nvPr/>
+        </p:nvSpPr>
+        <p:spPr>
+          <a:xfrm>
+            <a:off x="822960" y="4361688"/>
+            <a:ext cx="4754880" cy="1005840"/>
+          </a:xfrm>
+          <a:prstGeom prst="rect">
+            <a:avLst/>
+          </a:prstGeom>
+          <a:noFill/>
+          <a:ln/>
+        </p:spPr>
+        <p:txBody>
+          <a:bodyPr wrap="square" lIns="0" tIns="0" rIns="0" bIns="0" rtlCol="0" anchor="t"/>
+          <a:lstStyle/>
+          <a:p>
+            <a:pPr indent="0" marL="0">
+              <a:lnSpc>
+                <a:spcPct val="120000"/>
+              </a:lnSpc>
+              <a:buNone/>
+            </a:pPr>
+            <a:r>
+              <a:rPr lang="en-US" sz="1300" dirty="0">
+                <a:solidFill>
+                  <a:srgbClr val="667085"/>
+                </a:solidFill>
+                <a:latin typeface="IBM Plex Sans" pitchFamily="34" charset="0"/>
+                <a:ea typeface="IBM Plex Sans" pitchFamily="34" charset="-122"/>
+                <a:cs typeface="IBM Plex Sans" pitchFamily="34" charset="-120"/>
+              </a:rPr>
+              <a:t>Checking the length first means a format check can safely look at a particular position in the string.</a:t>
+            </a:r>
+            <a:endParaRPr lang="en-US" sz="1300" dirty="0"/>
+          </a:p>
+        </p:txBody>
+      </p:sp>
+      <p:sp>
+        <p:nvSpPr>
+          <p:cNvPr id="16" name="Shape 14"/>
           <p:cNvSpPr/>
           <p:nvPr/>
         </p:nvSpPr>
         <p:spPr>
           <a:xfrm>
-            <a:off x="10515600" y="4727448"/>
-            <a:ext cx="868680" cy="493776"/>
+            <a:off x="6217920" y="3794760"/>
+            <a:ext cx="5394960" cy="1737360"/>
           </a:xfrm>
           <a:prstGeom prst="roundRect">
             <a:avLst>
-              <a:gd name="adj" fmla="val 18519"/>
+              <a:gd name="adj" fmla="val 6316"/>
             </a:avLst>
           </a:prstGeom>
           <a:solidFill>
-            <a:srgbClr val="EEF2FB"/>
+            <a:srgbClr val="FFFFFF"/>
           </a:solidFill>
-          <a:ln/>
-        </p:spPr>
+          <a:ln w="15875">
+            <a:solidFill>
+              <a:srgbClr val="08A6A6"/>
+            </a:solidFill>
+            <a:prstDash val="solid"/>
+          </a:ln>
+        </p:spPr>
+      </p:sp>
+      <p:sp>
+        <p:nvSpPr>
+          <p:cNvPr id="17" name="Text 15"/>
+          <p:cNvSpPr txBox="1"/>
+          <p:nvPr/>
+        </p:nvSpPr>
+        <p:spPr>
+          <a:xfrm>
+            <a:off x="6537960" y="3977640"/>
+            <a:ext cx="4754880" cy="365760"/>
+          </a:xfrm>
+          <a:prstGeom prst="rect">
+            <a:avLst/>
+          </a:prstGeom>
+          <a:noFill/>
+          <a:ln/>
+        </p:spPr>
+        <p:txBody>
+          <a:bodyPr wrap="square" lIns="0" tIns="0" rIns="0" bIns="0" rtlCol="0" anchor="ctr"/>
+          <a:lstStyle/>
+          <a:p>
+            <a:pPr indent="0" marL="0">
+              <a:buNone/>
+            </a:pPr>
+            <a:r>
+              <a:rPr lang="en-US" sz="1600" b="1" dirty="0">
+                <a:solidFill>
+                  <a:srgbClr val="08A6A6"/>
+                </a:solidFill>
+                <a:latin typeface="IBM Plex Sans" pitchFamily="34" charset="0"/>
+                <a:ea typeface="IBM Plex Sans" pitchFamily="34" charset="-122"/>
+                <a:cs typeface="IBM Plex Sans" pitchFamily="34" charset="-120"/>
+              </a:rPr>
+              <a:t>Say what was wrong</a:t>
+            </a:r>
+            <a:endParaRPr lang="en-US" sz="1600" dirty="0"/>
+          </a:p>
+        </p:txBody>
       </p:sp>
       <p:sp>
         <p:nvSpPr>
@@ -4628,34 +4722,37 @@
         </p:nvSpPr>
         <p:spPr>
           <a:xfrm>
-            <a:off x="10515600" y="4727448"/>
-            <a:ext cx="868680" cy="493776"/>
-          </a:xfrm>
-          <a:prstGeom prst="rect">
-            <a:avLst/>
-          </a:prstGeom>
-          <a:noFill/>
-          <a:ln/>
-        </p:spPr>
-        <p:txBody>
-          <a:bodyPr wrap="square" lIns="0" tIns="0" rIns="0" bIns="0" rtlCol="0" anchor="ctr"/>
-          <a:lstStyle/>
-          <a:p>
-            <a:pPr algn="ctr" indent="0" marL="0">
-              <a:buNone/>
-            </a:pPr>
-            <a:r>
-              <a:rPr lang="en-US" sz="1500" b="1" dirty="0">
-                <a:solidFill>
-                  <a:srgbClr val="2D63FF"/>
-                </a:solidFill>
-                <a:latin typeface="IBM Plex Mono" pitchFamily="34" charset="0"/>
-                <a:ea typeface="IBM Plex Mono" pitchFamily="34" charset="-122"/>
-                <a:cs typeface="IBM Plex Mono" pitchFamily="34" charset="-120"/>
-              </a:rPr>
-              <a:t>[5]</a:t>
-            </a:r>
-            <a:endParaRPr lang="en-US" sz="1500" dirty="0"/>
+            <a:off x="6537960" y="4361688"/>
+            <a:ext cx="4754880" cy="1005840"/>
+          </a:xfrm>
+          <a:prstGeom prst="rect">
+            <a:avLst/>
+          </a:prstGeom>
+          <a:noFill/>
+          <a:ln/>
+        </p:spPr>
+        <p:txBody>
+          <a:bodyPr wrap="square" lIns="0" tIns="0" rIns="0" bIns="0" rtlCol="0" anchor="t"/>
+          <a:lstStyle/>
+          <a:p>
+            <a:pPr indent="0" marL="0">
+              <a:lnSpc>
+                <a:spcPct val="120000"/>
+              </a:lnSpc>
+              <a:buNone/>
+            </a:pPr>
+            <a:r>
+              <a:rPr lang="en-US" sz="1300" dirty="0">
+                <a:solidFill>
+                  <a:srgbClr val="667085"/>
+                </a:solidFill>
+                <a:latin typeface="IBM Plex Sans" pitchFamily="34" charset="0"/>
+                <a:ea typeface="IBM Plex Sans" pitchFamily="34" charset="-122"/>
+                <a:cs typeface="IBM Plex Sans" pitchFamily="34" charset="-120"/>
+              </a:rPr>
+              <a:t>A loop that only answers 'invalid' leaves the user guessing. Testing the rules one at a time lets the program name the rule that was broken, which is why these checks are usually written as if ... elif ...</a:t>
+            </a:r>
+            <a:endParaRPr lang="en-US" sz="1300" dirty="0"/>
           </a:p>
         </p:txBody>
       </p:sp>
@@ -4670,6 +4767,876 @@
 <file path=ppt/slides/slide14.xml><?xml version="1.0" encoding="utf-8"?>
 <p:sld xmlns:a="http://schemas.openxmlformats.org/drawingml/2006/main" xmlns:r="http://schemas.openxmlformats.org/officeDocument/2006/relationships" xmlns:p="http://schemas.openxmlformats.org/presentationml/2006/main">
   <p:cSld name="Slide 14">
+    <p:bg>
+      <p:bgPr>
+        <a:solidFill>
+          <a:srgbClr val="F7F7F4"/>
+        </a:solidFill>
+      </p:bgPr>
+    </p:bg>
+    <p:spTree>
+      <p:nvGrpSpPr>
+        <p:cNvPr id="1" name=""/>
+        <p:cNvGrpSpPr/>
+        <p:nvPr/>
+      </p:nvGrpSpPr>
+      <p:grpSpPr>
+        <a:xfrm>
+          <a:off x="0" y="0"/>
+          <a:ext cx="0" cy="0"/>
+          <a:chOff x="0" y="0"/>
+          <a:chExt cx="0" cy="0"/>
+        </a:xfrm>
+      </p:grpSpPr>
+      <p:sp>
+        <p:nvSpPr>
+          <p:cNvPr id="2" name="Shape 0"/>
+          <p:cNvSpPr/>
+          <p:nvPr/>
+        </p:nvSpPr>
+        <p:spPr>
+          <a:xfrm>
+            <a:off x="0" y="0"/>
+            <a:ext cx="12188952" cy="82296"/>
+          </a:xfrm>
+          <a:prstGeom prst="rect">
+            <a:avLst/>
+          </a:prstGeom>
+          <a:solidFill>
+            <a:srgbClr val="2D63FF"/>
+          </a:solidFill>
+          <a:ln/>
+        </p:spPr>
+      </p:sp>
+      <p:sp>
+        <p:nvSpPr>
+          <p:cNvPr id="3" name="Text 1"/>
+          <p:cNvSpPr txBox="1"/>
+          <p:nvPr/>
+        </p:nvSpPr>
+        <p:spPr>
+          <a:xfrm>
+            <a:off x="502920" y="6236208"/>
+            <a:ext cx="7772400" cy="365760"/>
+          </a:xfrm>
+          <a:prstGeom prst="rect">
+            <a:avLst/>
+          </a:prstGeom>
+          <a:noFill/>
+          <a:ln/>
+        </p:spPr>
+        <p:txBody>
+          <a:bodyPr wrap="square" lIns="0" tIns="0" rIns="0" bIns="0" rtlCol="0" anchor="ctr"/>
+          <a:lstStyle/>
+          <a:p>
+            <a:pPr indent="0" marL="0">
+              <a:buNone/>
+            </a:pPr>
+            <a:r>
+              <a:rPr lang="en-US" sz="1100" dirty="0">
+                <a:solidFill>
+                  <a:srgbClr val="667085"/>
+                </a:solidFill>
+                <a:latin typeface="IBM Plex Mono" pitchFamily="34" charset="0"/>
+                <a:ea typeface="IBM Plex Mono" pitchFamily="34" charset="-122"/>
+                <a:cs typeface="IBM Plex Mono" pitchFamily="34" charset="-120"/>
+              </a:rPr>
+              <a:t>Python programming  |  Lesson 12</a:t>
+            </a:r>
+            <a:endParaRPr lang="en-US" sz="1100" dirty="0"/>
+          </a:p>
+        </p:txBody>
+      </p:sp>
+      <p:sp>
+        <p:nvSpPr>
+          <p:cNvPr id="4" name="Text 2"/>
+          <p:cNvSpPr txBox="1"/>
+          <p:nvPr/>
+        </p:nvSpPr>
+        <p:spPr>
+          <a:xfrm>
+            <a:off x="9326880" y="6236208"/>
+            <a:ext cx="2377440" cy="365760"/>
+          </a:xfrm>
+          <a:prstGeom prst="rect">
+            <a:avLst/>
+          </a:prstGeom>
+          <a:noFill/>
+          <a:ln/>
+        </p:spPr>
+        <p:txBody>
+          <a:bodyPr wrap="square" lIns="0" tIns="0" rIns="0" bIns="0" rtlCol="0" anchor="ctr"/>
+          <a:lstStyle/>
+          <a:p>
+            <a:pPr algn="r" indent="0" marL="0">
+              <a:buNone/>
+            </a:pPr>
+            <a:r>
+              <a:rPr lang="en-US" sz="1100" dirty="0">
+                <a:solidFill>
+                  <a:srgbClr val="667085"/>
+                </a:solidFill>
+                <a:latin typeface="IBM Plex Mono" pitchFamily="34" charset="0"/>
+                <a:ea typeface="IBM Plex Mono" pitchFamily="34" charset="-122"/>
+                <a:cs typeface="IBM Plex Mono" pitchFamily="34" charset="-120"/>
+              </a:rPr>
+              <a:t>Revise 360</a:t>
+            </a:r>
+            <a:endParaRPr lang="en-US" sz="1100" dirty="0"/>
+          </a:p>
+        </p:txBody>
+      </p:sp>
+      <p:sp>
+        <p:nvSpPr>
+          <p:cNvPr id="5" name="Text 3"/>
+          <p:cNvSpPr txBox="1"/>
+          <p:nvPr/>
+        </p:nvSpPr>
+        <p:spPr>
+          <a:xfrm>
+            <a:off x="502920" y="411480"/>
+            <a:ext cx="11155680" cy="777240"/>
+          </a:xfrm>
+          <a:prstGeom prst="rect">
+            <a:avLst/>
+          </a:prstGeom>
+          <a:noFill/>
+          <a:ln/>
+        </p:spPr>
+        <p:txBody>
+          <a:bodyPr wrap="square" lIns="0" tIns="0" rIns="0" bIns="0" rtlCol="0" anchor="ctr"/>
+          <a:lstStyle/>
+          <a:p>
+            <a:pPr indent="0" marL="0">
+              <a:buNone/>
+            </a:pPr>
+            <a:r>
+              <a:rPr lang="en-US" sz="3200" b="1" dirty="0">
+                <a:solidFill>
+                  <a:srgbClr val="101828"/>
+                </a:solidFill>
+                <a:latin typeface="IBM Plex Sans" pitchFamily="34" charset="0"/>
+                <a:ea typeface="IBM Plex Sans" pitchFamily="34" charset="-122"/>
+                <a:cs typeface="IBM Plex Sans" pitchFamily="34" charset="-120"/>
+              </a:rPr>
+              <a:t>Exam practice</a:t>
+            </a:r>
+            <a:endParaRPr lang="en-US" sz="3200" dirty="0"/>
+          </a:p>
+        </p:txBody>
+      </p:sp>
+      <p:sp>
+        <p:nvSpPr>
+          <p:cNvPr id="6" name="Text 4"/>
+          <p:cNvSpPr txBox="1"/>
+          <p:nvPr/>
+        </p:nvSpPr>
+        <p:spPr>
+          <a:xfrm>
+            <a:off x="502920" y="1170432"/>
+            <a:ext cx="11155680" cy="411480"/>
+          </a:xfrm>
+          <a:prstGeom prst="rect">
+            <a:avLst/>
+          </a:prstGeom>
+          <a:noFill/>
+          <a:ln/>
+        </p:spPr>
+        <p:txBody>
+          <a:bodyPr wrap="square" lIns="0" tIns="0" rIns="0" bIns="0" rtlCol="0" anchor="ctr"/>
+          <a:lstStyle/>
+          <a:p>
+            <a:pPr indent="0" marL="0">
+              <a:buNone/>
+            </a:pPr>
+            <a:r>
+              <a:rPr lang="en-US" sz="1500" dirty="0">
+                <a:solidFill>
+                  <a:srgbClr val="667085"/>
+                </a:solidFill>
+                <a:latin typeface="IBM Plex Sans" pitchFamily="34" charset="0"/>
+                <a:ea typeface="IBM Plex Sans" pitchFamily="34" charset="-122"/>
+                <a:cs typeface="IBM Plex Sans" pitchFamily="34" charset="-120"/>
+              </a:rPr>
+              <a:t>Devices away. Answer from memory on the worksheet.</a:t>
+            </a:r>
+            <a:endParaRPr lang="en-US" sz="1500" dirty="0"/>
+          </a:p>
+        </p:txBody>
+      </p:sp>
+      <p:sp>
+        <p:nvSpPr>
+          <p:cNvPr id="7" name="Shape 5"/>
+          <p:cNvSpPr/>
+          <p:nvPr/>
+        </p:nvSpPr>
+        <p:spPr>
+          <a:xfrm>
+            <a:off x="502920" y="1828800"/>
+            <a:ext cx="11155680" cy="1097280"/>
+          </a:xfrm>
+          <a:prstGeom prst="roundRect">
+            <a:avLst>
+              <a:gd name="adj" fmla="val 10000"/>
+            </a:avLst>
+          </a:prstGeom>
+          <a:solidFill>
+            <a:srgbClr val="FFFFFF"/>
+          </a:solidFill>
+          <a:ln w="15875">
+            <a:solidFill>
+              <a:srgbClr val="D9DEE7"/>
+            </a:solidFill>
+            <a:prstDash val="solid"/>
+          </a:ln>
+        </p:spPr>
+      </p:sp>
+      <p:sp>
+        <p:nvSpPr>
+          <p:cNvPr id="8" name="Text 6"/>
+          <p:cNvSpPr txBox="1"/>
+          <p:nvPr/>
+        </p:nvSpPr>
+        <p:spPr>
+          <a:xfrm>
+            <a:off x="914400" y="1938528"/>
+            <a:ext cx="9418320" cy="877824"/>
+          </a:xfrm>
+          <a:prstGeom prst="rect">
+            <a:avLst/>
+          </a:prstGeom>
+          <a:noFill/>
+          <a:ln/>
+        </p:spPr>
+        <p:txBody>
+          <a:bodyPr wrap="square" lIns="0" tIns="0" rIns="0" bIns="0" rtlCol="0" anchor="ctr"/>
+          <a:lstStyle/>
+          <a:p>
+            <a:pPr indent="0" marL="0">
+              <a:lnSpc>
+                <a:spcPct val="118000"/>
+              </a:lnSpc>
+              <a:buNone/>
+            </a:pPr>
+            <a:r>
+              <a:rPr lang="en-US" sz="1700" dirty="0">
+                <a:solidFill>
+                  <a:srgbClr val="101828"/>
+                </a:solidFill>
+                <a:latin typeface="IBM Plex Sans" pitchFamily="34" charset="0"/>
+                <a:ea typeface="IBM Plex Sans" pitchFamily="34" charset="-122"/>
+                <a:cs typeface="IBM Plex Sans" pitchFamily="34" charset="-120"/>
+              </a:rPr>
+              <a:t>A range check for a score that must be from 1 to 10 inclusive is written </a:t>
+            </a:r>
+            <a:pPr indent="0" marL="0">
+              <a:lnSpc>
+                <a:spcPct val="118000"/>
+              </a:lnSpc>
+              <a:buNone/>
+            </a:pPr>
+            <a:r>
+              <a:rPr lang="en-US" sz="1700" dirty="0">
+                <a:solidFill>
+                  <a:srgbClr val="6B21A8"/>
+                </a:solidFill>
+                <a:latin typeface="IBM Plex Mono" pitchFamily="34" charset="0"/>
+                <a:ea typeface="IBM Plex Mono" pitchFamily="34" charset="-122"/>
+                <a:cs typeface="IBM Plex Mono" pitchFamily="34" charset="-120"/>
+              </a:rPr>
+              <a:t>if</a:t>
+            </a:r>
+            <a:pPr indent="0" marL="0">
+              <a:lnSpc>
+                <a:spcPct val="118000"/>
+              </a:lnSpc>
+              <a:buNone/>
+            </a:pPr>
+            <a:r>
+              <a:rPr lang="en-US" sz="1700" dirty="0">
+                <a:solidFill>
+                  <a:srgbClr val="18181B"/>
+                </a:solidFill>
+                <a:latin typeface="IBM Plex Mono" pitchFamily="34" charset="0"/>
+                <a:ea typeface="IBM Plex Mono" pitchFamily="34" charset="-122"/>
+                <a:cs typeface="IBM Plex Mono" pitchFamily="34" charset="-120"/>
+              </a:rPr>
+              <a:t> </a:t>
+            </a:r>
+            <a:pPr indent="0" marL="0">
+              <a:lnSpc>
+                <a:spcPct val="118000"/>
+              </a:lnSpc>
+              <a:buNone/>
+            </a:pPr>
+            <a:r>
+              <a:rPr lang="en-US" sz="1700" dirty="0">
+                <a:solidFill>
+                  <a:srgbClr val="18181B"/>
+                </a:solidFill>
+                <a:latin typeface="IBM Plex Mono" pitchFamily="34" charset="0"/>
+                <a:ea typeface="IBM Plex Mono" pitchFamily="34" charset="-122"/>
+                <a:cs typeface="IBM Plex Mono" pitchFamily="34" charset="-120"/>
+              </a:rPr>
+              <a:t>score</a:t>
+            </a:r>
+            <a:pPr indent="0" marL="0">
+              <a:lnSpc>
+                <a:spcPct val="118000"/>
+              </a:lnSpc>
+              <a:buNone/>
+            </a:pPr>
+            <a:r>
+              <a:rPr lang="en-US" sz="1700" dirty="0">
+                <a:solidFill>
+                  <a:srgbClr val="18181B"/>
+                </a:solidFill>
+                <a:latin typeface="IBM Plex Mono" pitchFamily="34" charset="0"/>
+                <a:ea typeface="IBM Plex Mono" pitchFamily="34" charset="-122"/>
+                <a:cs typeface="IBM Plex Mono" pitchFamily="34" charset="-120"/>
+              </a:rPr>
+              <a:t> </a:t>
+            </a:r>
+            <a:pPr indent="0" marL="0">
+              <a:lnSpc>
+                <a:spcPct val="118000"/>
+              </a:lnSpc>
+              <a:buNone/>
+            </a:pPr>
+            <a:r>
+              <a:rPr lang="en-US" sz="1700" dirty="0">
+                <a:solidFill>
+                  <a:srgbClr val="3F3F46"/>
+                </a:solidFill>
+                <a:latin typeface="IBM Plex Mono" pitchFamily="34" charset="0"/>
+                <a:ea typeface="IBM Plex Mono" pitchFamily="34" charset="-122"/>
+                <a:cs typeface="IBM Plex Mono" pitchFamily="34" charset="-120"/>
+              </a:rPr>
+              <a:t>&gt;</a:t>
+            </a:r>
+            <a:pPr indent="0" marL="0">
+              <a:lnSpc>
+                <a:spcPct val="118000"/>
+              </a:lnSpc>
+              <a:buNone/>
+            </a:pPr>
+            <a:r>
+              <a:rPr lang="en-US" sz="1700" dirty="0">
+                <a:solidFill>
+                  <a:srgbClr val="18181B"/>
+                </a:solidFill>
+                <a:latin typeface="IBM Plex Mono" pitchFamily="34" charset="0"/>
+                <a:ea typeface="IBM Plex Mono" pitchFamily="34" charset="-122"/>
+                <a:cs typeface="IBM Plex Mono" pitchFamily="34" charset="-120"/>
+              </a:rPr>
+              <a:t> </a:t>
+            </a:r>
+            <a:pPr indent="0" marL="0">
+              <a:lnSpc>
+                <a:spcPct val="118000"/>
+              </a:lnSpc>
+              <a:buNone/>
+            </a:pPr>
+            <a:r>
+              <a:rPr lang="en-US" sz="1700" dirty="0">
+                <a:solidFill>
+                  <a:srgbClr val="9A3412"/>
+                </a:solidFill>
+                <a:latin typeface="IBM Plex Mono" pitchFamily="34" charset="0"/>
+                <a:ea typeface="IBM Plex Mono" pitchFamily="34" charset="-122"/>
+                <a:cs typeface="IBM Plex Mono" pitchFamily="34" charset="-120"/>
+              </a:rPr>
+              <a:t>1</a:t>
+            </a:r>
+            <a:pPr indent="0" marL="0">
+              <a:lnSpc>
+                <a:spcPct val="118000"/>
+              </a:lnSpc>
+              <a:buNone/>
+            </a:pPr>
+            <a:r>
+              <a:rPr lang="en-US" sz="1700" dirty="0">
+                <a:solidFill>
+                  <a:srgbClr val="18181B"/>
+                </a:solidFill>
+                <a:latin typeface="IBM Plex Mono" pitchFamily="34" charset="0"/>
+                <a:ea typeface="IBM Plex Mono" pitchFamily="34" charset="-122"/>
+                <a:cs typeface="IBM Plex Mono" pitchFamily="34" charset="-120"/>
+              </a:rPr>
+              <a:t> </a:t>
+            </a:r>
+            <a:pPr indent="0" marL="0">
+              <a:lnSpc>
+                <a:spcPct val="118000"/>
+              </a:lnSpc>
+              <a:buNone/>
+            </a:pPr>
+            <a:r>
+              <a:rPr lang="en-US" sz="1700" dirty="0">
+                <a:solidFill>
+                  <a:srgbClr val="6B21A8"/>
+                </a:solidFill>
+                <a:latin typeface="IBM Plex Mono" pitchFamily="34" charset="0"/>
+                <a:ea typeface="IBM Plex Mono" pitchFamily="34" charset="-122"/>
+                <a:cs typeface="IBM Plex Mono" pitchFamily="34" charset="-120"/>
+              </a:rPr>
+              <a:t>and</a:t>
+            </a:r>
+            <a:pPr indent="0" marL="0">
+              <a:lnSpc>
+                <a:spcPct val="118000"/>
+              </a:lnSpc>
+              <a:buNone/>
+            </a:pPr>
+            <a:r>
+              <a:rPr lang="en-US" sz="1700" dirty="0">
+                <a:solidFill>
+                  <a:srgbClr val="18181B"/>
+                </a:solidFill>
+                <a:latin typeface="IBM Plex Mono" pitchFamily="34" charset="0"/>
+                <a:ea typeface="IBM Plex Mono" pitchFamily="34" charset="-122"/>
+                <a:cs typeface="IBM Plex Mono" pitchFamily="34" charset="-120"/>
+              </a:rPr>
+              <a:t> </a:t>
+            </a:r>
+            <a:pPr indent="0" marL="0">
+              <a:lnSpc>
+                <a:spcPct val="118000"/>
+              </a:lnSpc>
+              <a:buNone/>
+            </a:pPr>
+            <a:r>
+              <a:rPr lang="en-US" sz="1700" dirty="0">
+                <a:solidFill>
+                  <a:srgbClr val="18181B"/>
+                </a:solidFill>
+                <a:latin typeface="IBM Plex Mono" pitchFamily="34" charset="0"/>
+                <a:ea typeface="IBM Plex Mono" pitchFamily="34" charset="-122"/>
+                <a:cs typeface="IBM Plex Mono" pitchFamily="34" charset="-120"/>
+              </a:rPr>
+              <a:t>score</a:t>
+            </a:r>
+            <a:pPr indent="0" marL="0">
+              <a:lnSpc>
+                <a:spcPct val="118000"/>
+              </a:lnSpc>
+              <a:buNone/>
+            </a:pPr>
+            <a:r>
+              <a:rPr lang="en-US" sz="1700" dirty="0">
+                <a:solidFill>
+                  <a:srgbClr val="18181B"/>
+                </a:solidFill>
+                <a:latin typeface="IBM Plex Mono" pitchFamily="34" charset="0"/>
+                <a:ea typeface="IBM Plex Mono" pitchFamily="34" charset="-122"/>
+                <a:cs typeface="IBM Plex Mono" pitchFamily="34" charset="-120"/>
+              </a:rPr>
+              <a:t> </a:t>
+            </a:r>
+            <a:pPr indent="0" marL="0">
+              <a:lnSpc>
+                <a:spcPct val="118000"/>
+              </a:lnSpc>
+              <a:buNone/>
+            </a:pPr>
+            <a:r>
+              <a:rPr lang="en-US" sz="1700" dirty="0">
+                <a:solidFill>
+                  <a:srgbClr val="3F3F46"/>
+                </a:solidFill>
+                <a:latin typeface="IBM Plex Mono" pitchFamily="34" charset="0"/>
+                <a:ea typeface="IBM Plex Mono" pitchFamily="34" charset="-122"/>
+                <a:cs typeface="IBM Plex Mono" pitchFamily="34" charset="-120"/>
+              </a:rPr>
+              <a:t>&lt;</a:t>
+            </a:r>
+            <a:pPr indent="0" marL="0">
+              <a:lnSpc>
+                <a:spcPct val="118000"/>
+              </a:lnSpc>
+              <a:buNone/>
+            </a:pPr>
+            <a:r>
+              <a:rPr lang="en-US" sz="1700" dirty="0">
+                <a:solidFill>
+                  <a:srgbClr val="18181B"/>
+                </a:solidFill>
+                <a:latin typeface="IBM Plex Mono" pitchFamily="34" charset="0"/>
+                <a:ea typeface="IBM Plex Mono" pitchFamily="34" charset="-122"/>
+                <a:cs typeface="IBM Plex Mono" pitchFamily="34" charset="-120"/>
+              </a:rPr>
+              <a:t> </a:t>
+            </a:r>
+            <a:pPr indent="0" marL="0">
+              <a:lnSpc>
+                <a:spcPct val="118000"/>
+              </a:lnSpc>
+              <a:buNone/>
+            </a:pPr>
+            <a:r>
+              <a:rPr lang="en-US" sz="1700" dirty="0">
+                <a:solidFill>
+                  <a:srgbClr val="9A3412"/>
+                </a:solidFill>
+                <a:latin typeface="IBM Plex Mono" pitchFamily="34" charset="0"/>
+                <a:ea typeface="IBM Plex Mono" pitchFamily="34" charset="-122"/>
+                <a:cs typeface="IBM Plex Mono" pitchFamily="34" charset="-120"/>
+              </a:rPr>
+              <a:t>10</a:t>
+            </a:r>
+            <a:pPr indent="0" marL="0">
+              <a:lnSpc>
+                <a:spcPct val="118000"/>
+              </a:lnSpc>
+              <a:buNone/>
+            </a:pPr>
+            <a:r>
+              <a:rPr lang="en-US" sz="1700" dirty="0">
+                <a:solidFill>
+                  <a:srgbClr val="101828"/>
+                </a:solidFill>
+                <a:latin typeface="IBM Plex Sans" pitchFamily="34" charset="0"/>
+                <a:ea typeface="IBM Plex Sans" pitchFamily="34" charset="-122"/>
+                <a:cs typeface="IBM Plex Sans" pitchFamily="34" charset="-120"/>
+              </a:rPr>
+              <a:t>. State the two scores this wrongly refuses, and write the condition corrected.</a:t>
+            </a:r>
+            <a:endParaRPr lang="en-US" sz="1700" dirty="0"/>
+          </a:p>
+        </p:txBody>
+      </p:sp>
+      <p:sp>
+        <p:nvSpPr>
+          <p:cNvPr id="9" name="Shape 7"/>
+          <p:cNvSpPr/>
+          <p:nvPr/>
+        </p:nvSpPr>
+        <p:spPr>
+          <a:xfrm>
+            <a:off x="10515600" y="2130552"/>
+            <a:ext cx="868680" cy="493776"/>
+          </a:xfrm>
+          <a:prstGeom prst="roundRect">
+            <a:avLst>
+              <a:gd name="adj" fmla="val 18519"/>
+            </a:avLst>
+          </a:prstGeom>
+          <a:solidFill>
+            <a:srgbClr val="EEF2FB"/>
+          </a:solidFill>
+          <a:ln/>
+        </p:spPr>
+      </p:sp>
+      <p:sp>
+        <p:nvSpPr>
+          <p:cNvPr id="10" name="Text 8"/>
+          <p:cNvSpPr txBox="1"/>
+          <p:nvPr/>
+        </p:nvSpPr>
+        <p:spPr>
+          <a:xfrm>
+            <a:off x="10515600" y="2130552"/>
+            <a:ext cx="868680" cy="493776"/>
+          </a:xfrm>
+          <a:prstGeom prst="rect">
+            <a:avLst/>
+          </a:prstGeom>
+          <a:noFill/>
+          <a:ln/>
+        </p:spPr>
+        <p:txBody>
+          <a:bodyPr wrap="square" lIns="0" tIns="0" rIns="0" bIns="0" rtlCol="0" anchor="ctr"/>
+          <a:lstStyle/>
+          <a:p>
+            <a:pPr algn="ctr" indent="0" marL="0">
+              <a:buNone/>
+            </a:pPr>
+            <a:r>
+              <a:rPr lang="en-US" sz="1500" b="1" dirty="0">
+                <a:solidFill>
+                  <a:srgbClr val="2D63FF"/>
+                </a:solidFill>
+                <a:latin typeface="IBM Plex Mono" pitchFamily="34" charset="0"/>
+                <a:ea typeface="IBM Plex Mono" pitchFamily="34" charset="-122"/>
+                <a:cs typeface="IBM Plex Mono" pitchFamily="34" charset="-120"/>
+              </a:rPr>
+              <a:t>[3]</a:t>
+            </a:r>
+            <a:endParaRPr lang="en-US" sz="1500" dirty="0"/>
+          </a:p>
+        </p:txBody>
+      </p:sp>
+      <p:sp>
+        <p:nvSpPr>
+          <p:cNvPr id="11" name="Shape 9"/>
+          <p:cNvSpPr/>
+          <p:nvPr/>
+        </p:nvSpPr>
+        <p:spPr>
+          <a:xfrm>
+            <a:off x="502920" y="3127248"/>
+            <a:ext cx="11155680" cy="1097280"/>
+          </a:xfrm>
+          <a:prstGeom prst="roundRect">
+            <a:avLst>
+              <a:gd name="adj" fmla="val 10000"/>
+            </a:avLst>
+          </a:prstGeom>
+          <a:solidFill>
+            <a:srgbClr val="FFFFFF"/>
+          </a:solidFill>
+          <a:ln w="15875">
+            <a:solidFill>
+              <a:srgbClr val="D9DEE7"/>
+            </a:solidFill>
+            <a:prstDash val="solid"/>
+          </a:ln>
+        </p:spPr>
+      </p:sp>
+      <p:sp>
+        <p:nvSpPr>
+          <p:cNvPr id="12" name="Text 10"/>
+          <p:cNvSpPr txBox="1"/>
+          <p:nvPr/>
+        </p:nvSpPr>
+        <p:spPr>
+          <a:xfrm>
+            <a:off x="914400" y="3236976"/>
+            <a:ext cx="9418320" cy="877824"/>
+          </a:xfrm>
+          <a:prstGeom prst="rect">
+            <a:avLst/>
+          </a:prstGeom>
+          <a:noFill/>
+          <a:ln/>
+        </p:spPr>
+        <p:txBody>
+          <a:bodyPr wrap="square" lIns="0" tIns="0" rIns="0" bIns="0" rtlCol="0" anchor="ctr"/>
+          <a:lstStyle/>
+          <a:p>
+            <a:pPr indent="0" marL="0">
+              <a:lnSpc>
+                <a:spcPct val="118000"/>
+              </a:lnSpc>
+              <a:buNone/>
+            </a:pPr>
+            <a:r>
+              <a:rPr lang="en-US" sz="1700" dirty="0">
+                <a:solidFill>
+                  <a:srgbClr val="101828"/>
+                </a:solidFill>
+                <a:latin typeface="IBM Plex Sans" pitchFamily="34" charset="0"/>
+                <a:ea typeface="IBM Plex Sans" pitchFamily="34" charset="-122"/>
+                <a:cs typeface="IBM Plex Sans" pitchFamily="34" charset="-120"/>
+              </a:rPr>
+              <a:t>Write a program that keeps asking for a code of exactly one letter followed by two digits, saying what is wrong each time, until a valid code is typed.</a:t>
+            </a:r>
+            <a:endParaRPr lang="en-US" sz="1700" dirty="0"/>
+          </a:p>
+        </p:txBody>
+      </p:sp>
+      <p:sp>
+        <p:nvSpPr>
+          <p:cNvPr id="13" name="Shape 11"/>
+          <p:cNvSpPr/>
+          <p:nvPr/>
+        </p:nvSpPr>
+        <p:spPr>
+          <a:xfrm>
+            <a:off x="10515600" y="3429000"/>
+            <a:ext cx="868680" cy="493776"/>
+          </a:xfrm>
+          <a:prstGeom prst="roundRect">
+            <a:avLst>
+              <a:gd name="adj" fmla="val 18519"/>
+            </a:avLst>
+          </a:prstGeom>
+          <a:solidFill>
+            <a:srgbClr val="EEF2FB"/>
+          </a:solidFill>
+          <a:ln/>
+        </p:spPr>
+      </p:sp>
+      <p:sp>
+        <p:nvSpPr>
+          <p:cNvPr id="14" name="Text 12"/>
+          <p:cNvSpPr txBox="1"/>
+          <p:nvPr/>
+        </p:nvSpPr>
+        <p:spPr>
+          <a:xfrm>
+            <a:off x="10515600" y="3429000"/>
+            <a:ext cx="868680" cy="493776"/>
+          </a:xfrm>
+          <a:prstGeom prst="rect">
+            <a:avLst/>
+          </a:prstGeom>
+          <a:noFill/>
+          <a:ln/>
+        </p:spPr>
+        <p:txBody>
+          <a:bodyPr wrap="square" lIns="0" tIns="0" rIns="0" bIns="0" rtlCol="0" anchor="ctr"/>
+          <a:lstStyle/>
+          <a:p>
+            <a:pPr algn="ctr" indent="0" marL="0">
+              <a:buNone/>
+            </a:pPr>
+            <a:r>
+              <a:rPr lang="en-US" sz="1500" b="1" dirty="0">
+                <a:solidFill>
+                  <a:srgbClr val="2D63FF"/>
+                </a:solidFill>
+                <a:latin typeface="IBM Plex Mono" pitchFamily="34" charset="0"/>
+                <a:ea typeface="IBM Plex Mono" pitchFamily="34" charset="-122"/>
+                <a:cs typeface="IBM Plex Mono" pitchFamily="34" charset="-120"/>
+              </a:rPr>
+              <a:t>[6]</a:t>
+            </a:r>
+            <a:endParaRPr lang="en-US" sz="1500" dirty="0"/>
+          </a:p>
+        </p:txBody>
+      </p:sp>
+      <p:sp>
+        <p:nvSpPr>
+          <p:cNvPr id="15" name="Shape 13"/>
+          <p:cNvSpPr/>
+          <p:nvPr/>
+        </p:nvSpPr>
+        <p:spPr>
+          <a:xfrm>
+            <a:off x="502920" y="4425696"/>
+            <a:ext cx="11155680" cy="1097280"/>
+          </a:xfrm>
+          <a:prstGeom prst="roundRect">
+            <a:avLst>
+              <a:gd name="adj" fmla="val 10000"/>
+            </a:avLst>
+          </a:prstGeom>
+          <a:solidFill>
+            <a:srgbClr val="FFFFFF"/>
+          </a:solidFill>
+          <a:ln w="15875">
+            <a:solidFill>
+              <a:srgbClr val="D9DEE7"/>
+            </a:solidFill>
+            <a:prstDash val="solid"/>
+          </a:ln>
+        </p:spPr>
+      </p:sp>
+      <p:sp>
+        <p:nvSpPr>
+          <p:cNvPr id="16" name="Text 14"/>
+          <p:cNvSpPr txBox="1"/>
+          <p:nvPr/>
+        </p:nvSpPr>
+        <p:spPr>
+          <a:xfrm>
+            <a:off x="914400" y="4535424"/>
+            <a:ext cx="9418320" cy="877824"/>
+          </a:xfrm>
+          <a:prstGeom prst="rect">
+            <a:avLst/>
+          </a:prstGeom>
+          <a:noFill/>
+          <a:ln/>
+        </p:spPr>
+        <p:txBody>
+          <a:bodyPr wrap="square" lIns="0" tIns="0" rIns="0" bIns="0" rtlCol="0" anchor="ctr"/>
+          <a:lstStyle/>
+          <a:p>
+            <a:pPr indent="0" marL="0">
+              <a:lnSpc>
+                <a:spcPct val="118000"/>
+              </a:lnSpc>
+              <a:buNone/>
+            </a:pPr>
+            <a:r>
+              <a:rPr lang="en-US" sz="1700" dirty="0">
+                <a:solidFill>
+                  <a:srgbClr val="101828"/>
+                </a:solidFill>
+                <a:latin typeface="IBM Plex Sans" pitchFamily="34" charset="0"/>
+                <a:ea typeface="IBM Plex Sans" pitchFamily="34" charset="-122"/>
+                <a:cs typeface="IBM Plex Sans" pitchFamily="34" charset="-120"/>
+              </a:rPr>
+              <a:t>Write a program that allows three attempts at a four-digit passcode already held in the program, and prints Locked when all three attempts are wrong.</a:t>
+            </a:r>
+            <a:endParaRPr lang="en-US" sz="1700" dirty="0"/>
+          </a:p>
+        </p:txBody>
+      </p:sp>
+      <p:sp>
+        <p:nvSpPr>
+          <p:cNvPr id="17" name="Shape 15"/>
+          <p:cNvSpPr/>
+          <p:nvPr/>
+        </p:nvSpPr>
+        <p:spPr>
+          <a:xfrm>
+            <a:off x="10515600" y="4727448"/>
+            <a:ext cx="868680" cy="493776"/>
+          </a:xfrm>
+          <a:prstGeom prst="roundRect">
+            <a:avLst>
+              <a:gd name="adj" fmla="val 18519"/>
+            </a:avLst>
+          </a:prstGeom>
+          <a:solidFill>
+            <a:srgbClr val="EEF2FB"/>
+          </a:solidFill>
+          <a:ln/>
+        </p:spPr>
+      </p:sp>
+      <p:sp>
+        <p:nvSpPr>
+          <p:cNvPr id="18" name="Text 16"/>
+          <p:cNvSpPr txBox="1"/>
+          <p:nvPr/>
+        </p:nvSpPr>
+        <p:spPr>
+          <a:xfrm>
+            <a:off x="10515600" y="4727448"/>
+            <a:ext cx="868680" cy="493776"/>
+          </a:xfrm>
+          <a:prstGeom prst="rect">
+            <a:avLst/>
+          </a:prstGeom>
+          <a:noFill/>
+          <a:ln/>
+        </p:spPr>
+        <p:txBody>
+          <a:bodyPr wrap="square" lIns="0" tIns="0" rIns="0" bIns="0" rtlCol="0" anchor="ctr"/>
+          <a:lstStyle/>
+          <a:p>
+            <a:pPr algn="ctr" indent="0" marL="0">
+              <a:buNone/>
+            </a:pPr>
+            <a:r>
+              <a:rPr lang="en-US" sz="1500" b="1" dirty="0">
+                <a:solidFill>
+                  <a:srgbClr val="2D63FF"/>
+                </a:solidFill>
+                <a:latin typeface="IBM Plex Mono" pitchFamily="34" charset="0"/>
+                <a:ea typeface="IBM Plex Mono" pitchFamily="34" charset="-122"/>
+                <a:cs typeface="IBM Plex Mono" pitchFamily="34" charset="-120"/>
+              </a:rPr>
+              <a:t>[5]</a:t>
+            </a:r>
+            <a:endParaRPr lang="en-US" sz="1500" dirty="0"/>
+          </a:p>
+        </p:txBody>
+      </p:sp>
+    </p:spTree>
+  </p:cSld>
+  <p:clrMapOvr>
+    <a:masterClrMapping/>
+  </p:clrMapOvr>
+</p:sld>
+</file>
+
+<file path=ppt/slides/slide15.xml><?xml version="1.0" encoding="utf-8"?>
+<p:sld xmlns:a="http://schemas.openxmlformats.org/drawingml/2006/main" xmlns:r="http://schemas.openxmlformats.org/officeDocument/2006/relationships" xmlns:p="http://schemas.openxmlformats.org/presentationml/2006/main">
+  <p:cSld name="Slide 15">
     <p:bg>
       <p:bgPr>
         <a:solidFill>
